--- a/output/wordlabs-less-suffix-3day.pptx
+++ b/output/wordlabs-less-suffix-3day.pptx
@@ -6057,7 +6057,7 @@
                 <a:ea typeface="Calibri" pitchFamily="34" charset="-122"/>
                 <a:cs typeface="Calibri" pitchFamily="34" charset="-120"/>
               </a:rPr>
-              <a:t>careless</a:t>
+              <a:t>fearless</a:t>
             </a:r>
             <a:pPr algn="l" indent="0" marL="0">
               <a:buNone/>
@@ -6071,118 +6071,215 @@
                 <a:ea typeface="Calibri" pitchFamily="34" charset="-122"/>
                 <a:cs typeface="Calibri" pitchFamily="34" charset="-120"/>
               </a:rPr>
-              <a:t> student was </a:t>
-            </a:r>
+              <a:t> girl climbed the tallest tree in the playground without any help.</a:t>
+            </a:r>
+            <a:endParaRPr lang="en-US" sz="1800" dirty="0"/>
+          </a:p>
+        </p:txBody>
+      </p:sp>
+      <p:sp>
+        <p:nvSpPr>
+          <p:cNvPr id="13" name="Shape 11"/>
+          <p:cNvSpPr/>
+          <p:nvPr/>
+        </p:nvSpPr>
+        <p:spPr>
+          <a:xfrm>
+            <a:off x="365760" y="2852928"/>
+            <a:ext cx="8412480" cy="475488"/>
+          </a:xfrm>
+          <a:prstGeom prst="rect">
+            <a:avLst>
+              <a:gd name="adj" fmla="val 15385"/>
+            </a:avLst>
+          </a:prstGeom>
+          <a:solidFill>
+            <a:srgbClr val="CCFBF1"/>
+          </a:solidFill>
+          <a:ln w="12700">
+            <a:solidFill>
+              <a:srgbClr val="0D9488"/>
+            </a:solidFill>
+            <a:prstDash val="solid"/>
+          </a:ln>
+        </p:spPr>
+      </p:sp>
+      <p:sp>
+        <p:nvSpPr>
+          <p:cNvPr id="14" name="Text 12"/>
+          <p:cNvSpPr/>
+          <p:nvPr/>
+        </p:nvSpPr>
+        <p:spPr>
+          <a:xfrm>
+            <a:off x="502920" y="2852928"/>
+            <a:ext cx="8229600" cy="475488"/>
+          </a:xfrm>
+          <a:prstGeom prst="rect">
+            <a:avLst/>
+          </a:prstGeom>
+          <a:noFill/>
+          <a:ln/>
+        </p:spPr>
+        <p:txBody>
+          <a:bodyPr wrap="square" rtlCol="0" anchor="ctr"/>
+          <a:lstStyle/>
+          <a:p>
             <a:pPr algn="l" indent="0" marL="0">
               <a:buNone/>
             </a:pPr>
             <a:r>
-              <a:rPr lang="en-US" sz="1800" b="1" dirty="0">
-                <a:solidFill>
-                  <a:srgbClr val="0D9488"/>
-                </a:solidFill>
-                <a:highlight>
-                  <a:srgbClr val="CCFBF1"/>
-                </a:highlight>
+              <a:rPr lang="en-US" sz="1200" b="1" dirty="0">
+                <a:solidFill>
+                  <a:srgbClr val="0F766E"/>
+                </a:solidFill>
                 <a:latin typeface="Calibri" pitchFamily="34" charset="0"/>
                 <a:ea typeface="Calibri" pitchFamily="34" charset="-122"/>
                 <a:cs typeface="Calibri" pitchFamily="34" charset="-120"/>
               </a:rPr>
-              <a:t>speechless</a:t>
-            </a:r>
-            <a:pPr algn="l" indent="0" marL="0">
-              <a:buNone/>
-            </a:pPr>
-            <a:r>
-              <a:rPr lang="en-US" sz="1800" dirty="0">
-                <a:solidFill>
-                  <a:srgbClr val="0F172A"/>
+              <a:t>Now rewrite each focus word below with space between letters — leave room for your breakdown.</a:t>
+            </a:r>
+            <a:endParaRPr lang="en-US" sz="1200" dirty="0"/>
+          </a:p>
+        </p:txBody>
+      </p:sp>
+      <p:sp>
+        <p:nvSpPr>
+          <p:cNvPr id="15" name="Shape 13"/>
+          <p:cNvSpPr/>
+          <p:nvPr/>
+        </p:nvSpPr>
+        <p:spPr>
+          <a:xfrm>
+            <a:off x="1737360" y="3456432"/>
+            <a:ext cx="2560320" cy="1005840"/>
+          </a:xfrm>
+          <a:prstGeom prst="rect">
+            <a:avLst>
+              <a:gd name="adj" fmla="val 7273"/>
+            </a:avLst>
+          </a:prstGeom>
+          <a:solidFill>
+            <a:srgbClr val="F8FAFC"/>
+          </a:solidFill>
+          <a:ln w="12700">
+            <a:solidFill>
+              <a:srgbClr val="E2E8F0"/>
+            </a:solidFill>
+            <a:prstDash val="solid"/>
+          </a:ln>
+        </p:spPr>
+      </p:sp>
+      <p:sp>
+        <p:nvSpPr>
+          <p:cNvPr id="16" name="Shape 14"/>
+          <p:cNvSpPr/>
+          <p:nvPr/>
+        </p:nvSpPr>
+        <p:spPr>
+          <a:xfrm>
+            <a:off x="1737360" y="3977640"/>
+            <a:ext cx="2560320" cy="0"/>
+          </a:xfrm>
+          <a:prstGeom prst="line">
+            <a:avLst/>
+          </a:prstGeom>
+          <a:noFill/>
+          <a:ln w="12700">
+            <a:solidFill>
+              <a:srgbClr val="E2E8F0"/>
+            </a:solidFill>
+            <a:prstDash val="dash"/>
+          </a:ln>
+        </p:spPr>
+      </p:sp>
+      <p:sp>
+        <p:nvSpPr>
+          <p:cNvPr id="17" name="Text 15"/>
+          <p:cNvSpPr/>
+          <p:nvPr/>
+        </p:nvSpPr>
+        <p:spPr>
+          <a:xfrm>
+            <a:off x="1737360" y="3456432"/>
+            <a:ext cx="2560320" cy="502920"/>
+          </a:xfrm>
+          <a:prstGeom prst="rect">
+            <a:avLst/>
+          </a:prstGeom>
+          <a:noFill/>
+          <a:ln/>
+        </p:spPr>
+        <p:txBody>
+          <a:bodyPr wrap="square" lIns="0" tIns="0" rIns="0" bIns="0" rtlCol="0" anchor="ctr"/>
+          <a:lstStyle/>
+          <a:p>
+            <a:pPr algn="ctr" indent="0" marL="0">
+              <a:buNone/>
+            </a:pPr>
+            <a:r>
+              <a:rPr lang="en-US" sz="1400" b="1" dirty="0">
+                <a:solidFill>
+                  <a:srgbClr val="0D9488"/>
+                </a:solidFill>
+                <a:latin typeface="Trebuchet MS" pitchFamily="34" charset="0"/>
+                <a:ea typeface="Trebuchet MS" pitchFamily="34" charset="-122"/>
+                <a:cs typeface="Trebuchet MS" pitchFamily="34" charset="-120"/>
+              </a:rPr>
+              <a:t>fearless</a:t>
+            </a:r>
+            <a:endParaRPr lang="en-US" sz="1400" dirty="0"/>
+          </a:p>
+        </p:txBody>
+      </p:sp>
+      <p:sp>
+        <p:nvSpPr>
+          <p:cNvPr id="18" name="Text 16"/>
+          <p:cNvSpPr/>
+          <p:nvPr/>
+        </p:nvSpPr>
+        <p:spPr>
+          <a:xfrm>
+            <a:off x="1737360" y="4005072"/>
+            <a:ext cx="2560320" cy="457200"/>
+          </a:xfrm>
+          <a:prstGeom prst="rect">
+            <a:avLst/>
+          </a:prstGeom>
+          <a:noFill/>
+          <a:ln/>
+        </p:spPr>
+        <p:txBody>
+          <a:bodyPr wrap="square" lIns="0" tIns="0" rIns="0" bIns="0" rtlCol="0" anchor="ctr"/>
+          <a:lstStyle/>
+          <a:p>
+            <a:pPr algn="ctr" indent="0" marL="0">
+              <a:buNone/>
+            </a:pPr>
+            <a:r>
+              <a:rPr lang="en-US" sz="900" i="1" dirty="0">
+                <a:solidFill>
+                  <a:srgbClr val="475569"/>
                 </a:solidFill>
                 <a:latin typeface="Calibri" pitchFamily="34" charset="0"/>
                 <a:ea typeface="Calibri" pitchFamily="34" charset="-122"/>
                 <a:cs typeface="Calibri" pitchFamily="34" charset="-120"/>
               </a:rPr>
-              <a:t> when she saw her lost book on the teacher's desk.</a:t>
-            </a:r>
-            <a:endParaRPr lang="en-US" sz="1800" dirty="0"/>
-          </a:p>
-        </p:txBody>
-      </p:sp>
-      <p:sp>
-        <p:nvSpPr>
-          <p:cNvPr id="13" name="Shape 11"/>
-          <p:cNvSpPr/>
-          <p:nvPr/>
-        </p:nvSpPr>
-        <p:spPr>
-          <a:xfrm>
-            <a:off x="365760" y="2852928"/>
-            <a:ext cx="8412480" cy="475488"/>
-          </a:xfrm>
-          <a:prstGeom prst="rect">
-            <a:avLst>
-              <a:gd name="adj" fmla="val 15385"/>
-            </a:avLst>
-          </a:prstGeom>
-          <a:solidFill>
-            <a:srgbClr val="CCFBF1"/>
-          </a:solidFill>
-          <a:ln w="12700">
-            <a:solidFill>
-              <a:srgbClr val="0D9488"/>
-            </a:solidFill>
-            <a:prstDash val="solid"/>
-          </a:ln>
-        </p:spPr>
-      </p:sp>
-      <p:sp>
-        <p:nvSpPr>
-          <p:cNvPr id="14" name="Text 12"/>
-          <p:cNvSpPr/>
-          <p:nvPr/>
-        </p:nvSpPr>
-        <p:spPr>
-          <a:xfrm>
-            <a:off x="502920" y="2852928"/>
-            <a:ext cx="8229600" cy="475488"/>
-          </a:xfrm>
-          <a:prstGeom prst="rect">
-            <a:avLst/>
-          </a:prstGeom>
-          <a:noFill/>
-          <a:ln/>
-        </p:spPr>
-        <p:txBody>
-          <a:bodyPr wrap="square" rtlCol="0" anchor="ctr"/>
-          <a:lstStyle/>
-          <a:p>
-            <a:pPr algn="l" indent="0" marL="0">
-              <a:buNone/>
-            </a:pPr>
-            <a:r>
-              <a:rPr lang="en-US" sz="1200" b="1" dirty="0">
-                <a:solidFill>
-                  <a:srgbClr val="0F766E"/>
-                </a:solidFill>
-                <a:latin typeface="Calibri" pitchFamily="34" charset="0"/>
-                <a:ea typeface="Calibri" pitchFamily="34" charset="-122"/>
-                <a:cs typeface="Calibri" pitchFamily="34" charset="-120"/>
-              </a:rPr>
-              <a:t>Now rewrite each focus word below with space between letters — leave room for your breakdown.</a:t>
-            </a:r>
-            <a:endParaRPr lang="en-US" sz="1200" dirty="0"/>
-          </a:p>
-        </p:txBody>
-      </p:sp>
-      <p:sp>
-        <p:nvSpPr>
-          <p:cNvPr id="15" name="Shape 13"/>
-          <p:cNvSpPr/>
-          <p:nvPr/>
-        </p:nvSpPr>
-        <p:spPr>
-          <a:xfrm>
-            <a:off x="1737360" y="3456432"/>
+              <a:t>write your breakdown below</a:t>
+            </a:r>
+            <a:endParaRPr lang="en-US" sz="900" dirty="0"/>
+          </a:p>
+        </p:txBody>
+      </p:sp>
+      <p:sp>
+        <p:nvSpPr>
+          <p:cNvPr id="19" name="Shape 17"/>
+          <p:cNvSpPr/>
+          <p:nvPr/>
+        </p:nvSpPr>
+        <p:spPr>
+          <a:xfrm>
+            <a:off x="4572000" y="3456432"/>
             <a:ext cx="2560320" cy="1005840"/>
           </a:xfrm>
           <a:prstGeom prst="rect">
@@ -6203,13 +6300,13 @@
       </p:sp>
       <p:sp>
         <p:nvSpPr>
-          <p:cNvPr id="16" name="Shape 14"/>
-          <p:cNvSpPr/>
-          <p:nvPr/>
-        </p:nvSpPr>
-        <p:spPr>
-          <a:xfrm>
-            <a:off x="1737360" y="3977640"/>
+          <p:cNvPr id="20" name="Shape 18"/>
+          <p:cNvSpPr/>
+          <p:nvPr/>
+        </p:nvSpPr>
+        <p:spPr>
+          <a:xfrm>
+            <a:off x="4572000" y="3977640"/>
             <a:ext cx="2560320" cy="0"/>
           </a:xfrm>
           <a:prstGeom prst="line">
@@ -6226,13 +6323,13 @@
       </p:sp>
       <p:sp>
         <p:nvSpPr>
-          <p:cNvPr id="17" name="Text 15"/>
-          <p:cNvSpPr/>
-          <p:nvPr/>
-        </p:nvSpPr>
-        <p:spPr>
-          <a:xfrm>
-            <a:off x="1737360" y="3456432"/>
+          <p:cNvPr id="21" name="Text 19"/>
+          <p:cNvSpPr/>
+          <p:nvPr/>
+        </p:nvSpPr>
+        <p:spPr>
+          <a:xfrm>
+            <a:off x="4572000" y="3456432"/>
             <a:ext cx="2560320" cy="502920"/>
           </a:xfrm>
           <a:prstGeom prst="rect">
@@ -6257,135 +6354,7 @@
                 <a:ea typeface="Trebuchet MS" pitchFamily="34" charset="-122"/>
                 <a:cs typeface="Trebuchet MS" pitchFamily="34" charset="-120"/>
               </a:rPr>
-              <a:t>careless</a:t>
-            </a:r>
-            <a:endParaRPr lang="en-US" sz="1400" dirty="0"/>
-          </a:p>
-        </p:txBody>
-      </p:sp>
-      <p:sp>
-        <p:nvSpPr>
-          <p:cNvPr id="18" name="Text 16"/>
-          <p:cNvSpPr/>
-          <p:nvPr/>
-        </p:nvSpPr>
-        <p:spPr>
-          <a:xfrm>
-            <a:off x="1737360" y="4005072"/>
-            <a:ext cx="2560320" cy="457200"/>
-          </a:xfrm>
-          <a:prstGeom prst="rect">
-            <a:avLst/>
-          </a:prstGeom>
-          <a:noFill/>
-          <a:ln/>
-        </p:spPr>
-        <p:txBody>
-          <a:bodyPr wrap="square" lIns="0" tIns="0" rIns="0" bIns="0" rtlCol="0" anchor="ctr"/>
-          <a:lstStyle/>
-          <a:p>
-            <a:pPr algn="ctr" indent="0" marL="0">
-              <a:buNone/>
-            </a:pPr>
-            <a:r>
-              <a:rPr lang="en-US" sz="900" i="1" dirty="0">
-                <a:solidFill>
-                  <a:srgbClr val="475569"/>
-                </a:solidFill>
-                <a:latin typeface="Calibri" pitchFamily="34" charset="0"/>
-                <a:ea typeface="Calibri" pitchFamily="34" charset="-122"/>
-                <a:cs typeface="Calibri" pitchFamily="34" charset="-120"/>
-              </a:rPr>
-              <a:t>write your breakdown below</a:t>
-            </a:r>
-            <a:endParaRPr lang="en-US" sz="900" dirty="0"/>
-          </a:p>
-        </p:txBody>
-      </p:sp>
-      <p:sp>
-        <p:nvSpPr>
-          <p:cNvPr id="19" name="Shape 17"/>
-          <p:cNvSpPr/>
-          <p:nvPr/>
-        </p:nvSpPr>
-        <p:spPr>
-          <a:xfrm>
-            <a:off x="4572000" y="3456432"/>
-            <a:ext cx="2560320" cy="1005840"/>
-          </a:xfrm>
-          <a:prstGeom prst="rect">
-            <a:avLst>
-              <a:gd name="adj" fmla="val 7273"/>
-            </a:avLst>
-          </a:prstGeom>
-          <a:solidFill>
-            <a:srgbClr val="F8FAFC"/>
-          </a:solidFill>
-          <a:ln w="12700">
-            <a:solidFill>
-              <a:srgbClr val="E2E8F0"/>
-            </a:solidFill>
-            <a:prstDash val="solid"/>
-          </a:ln>
-        </p:spPr>
-      </p:sp>
-      <p:sp>
-        <p:nvSpPr>
-          <p:cNvPr id="20" name="Shape 18"/>
-          <p:cNvSpPr/>
-          <p:nvPr/>
-        </p:nvSpPr>
-        <p:spPr>
-          <a:xfrm>
-            <a:off x="4572000" y="3977640"/>
-            <a:ext cx="2560320" cy="0"/>
-          </a:xfrm>
-          <a:prstGeom prst="line">
-            <a:avLst/>
-          </a:prstGeom>
-          <a:noFill/>
-          <a:ln w="12700">
-            <a:solidFill>
-              <a:srgbClr val="E2E8F0"/>
-            </a:solidFill>
-            <a:prstDash val="dash"/>
-          </a:ln>
-        </p:spPr>
-      </p:sp>
-      <p:sp>
-        <p:nvSpPr>
-          <p:cNvPr id="21" name="Text 19"/>
-          <p:cNvSpPr/>
-          <p:nvPr/>
-        </p:nvSpPr>
-        <p:spPr>
-          <a:xfrm>
-            <a:off x="4572000" y="3456432"/>
-            <a:ext cx="2560320" cy="502920"/>
-          </a:xfrm>
-          <a:prstGeom prst="rect">
-            <a:avLst/>
-          </a:prstGeom>
-          <a:noFill/>
-          <a:ln/>
-        </p:spPr>
-        <p:txBody>
-          <a:bodyPr wrap="square" lIns="0" tIns="0" rIns="0" bIns="0" rtlCol="0" anchor="ctr"/>
-          <a:lstStyle/>
-          <a:p>
-            <a:pPr algn="ctr" indent="0" marL="0">
-              <a:buNone/>
-            </a:pPr>
-            <a:r>
-              <a:rPr lang="en-US" sz="1400" b="1" dirty="0">
-                <a:solidFill>
-                  <a:srgbClr val="0D9488"/>
-                </a:solidFill>
-                <a:latin typeface="Trebuchet MS" pitchFamily="34" charset="0"/>
-                <a:ea typeface="Trebuchet MS" pitchFamily="34" charset="-122"/>
-                <a:cs typeface="Trebuchet MS" pitchFamily="34" charset="-120"/>
-              </a:rPr>
-              <a:t>speechless</a:t>
+              <a:t>helpless</a:t>
             </a:r>
             <a:endParaRPr lang="en-US" sz="1400" dirty="0"/>
           </a:p>
@@ -6855,7 +6824,7 @@
                 <a:ea typeface="Trebuchet MS" pitchFamily="34" charset="-122"/>
                 <a:cs typeface="Trebuchet MS" pitchFamily="34" charset="-120"/>
               </a:rPr>
-              <a:t>careless</a:t>
+              <a:t>fearless</a:t>
             </a:r>
             <a:endParaRPr lang="en-US" sz="2800" dirty="0"/>
           </a:p>
@@ -7682,7 +7651,7 @@
                 <a:ea typeface="Trebuchet MS" pitchFamily="34" charset="-122"/>
                 <a:cs typeface="Trebuchet MS" pitchFamily="34" charset="-120"/>
               </a:rPr>
-              <a:t>careless</a:t>
+              <a:t>fearless</a:t>
             </a:r>
             <a:endParaRPr lang="en-US" sz="2800" dirty="0"/>
           </a:p>
@@ -7821,7 +7790,7 @@
                 <a:ea typeface="Trebuchet MS" pitchFamily="34" charset="-122"/>
                 <a:cs typeface="Trebuchet MS" pitchFamily="34" charset="-120"/>
               </a:rPr>
-              <a:t>care</a:t>
+              <a:t>fear</a:t>
             </a:r>
             <a:endParaRPr lang="en-US" sz="1300" dirty="0"/>
           </a:p>
@@ -7860,7 +7829,7 @@
                 <a:ea typeface="Calibri" pitchFamily="34" charset="-122"/>
                 <a:cs typeface="Calibri" pitchFamily="34" charset="-120"/>
               </a:rPr>
-              <a:t>attention, worry</a:t>
+              <a:t>to be afraid</a:t>
             </a:r>
             <a:endParaRPr lang="en-US" sz="850" dirty="0"/>
           </a:p>
@@ -8667,7 +8636,7 @@
                 <a:ea typeface="Trebuchet MS" pitchFamily="34" charset="-122"/>
                 <a:cs typeface="Trebuchet MS" pitchFamily="34" charset="-120"/>
               </a:rPr>
-              <a:t>careless</a:t>
+              <a:t>fearless</a:t>
             </a:r>
             <a:endParaRPr lang="en-US" sz="2800" dirty="0"/>
           </a:p>
@@ -8806,7 +8775,7 @@
                 <a:ea typeface="Trebuchet MS" pitchFamily="34" charset="-122"/>
                 <a:cs typeface="Trebuchet MS" pitchFamily="34" charset="-120"/>
               </a:rPr>
-              <a:t>care</a:t>
+              <a:t>fear</a:t>
             </a:r>
             <a:endParaRPr lang="en-US" sz="1300" dirty="0"/>
           </a:p>
@@ -8845,7 +8814,7 @@
                 <a:ea typeface="Calibri" pitchFamily="34" charset="-122"/>
                 <a:cs typeface="Calibri" pitchFamily="34" charset="-120"/>
               </a:rPr>
-              <a:t>attention, worry</a:t>
+              <a:t>to be afraid</a:t>
             </a:r>
             <a:endParaRPr lang="en-US" sz="850" dirty="0"/>
           </a:p>
@@ -9116,7 +9085,7 @@
                 <a:ea typeface="Trebuchet MS" pitchFamily="34" charset="-122"/>
                 <a:cs typeface="Trebuchet MS" pitchFamily="34" charset="-120"/>
               </a:rPr>
-              <a:t>care</a:t>
+              <a:t>fear</a:t>
             </a:r>
             <a:endParaRPr lang="en-US" sz="1400" dirty="0"/>
           </a:p>
@@ -9784,7 +9753,7 @@
                 <a:ea typeface="Trebuchet MS" pitchFamily="34" charset="-122"/>
                 <a:cs typeface="Trebuchet MS" pitchFamily="34" charset="-120"/>
               </a:rPr>
-              <a:t>careless</a:t>
+              <a:t>fearless</a:t>
             </a:r>
             <a:endParaRPr lang="en-US" sz="2800" dirty="0"/>
           </a:p>
@@ -9923,7 +9892,7 @@
                 <a:ea typeface="Trebuchet MS" pitchFamily="34" charset="-122"/>
                 <a:cs typeface="Trebuchet MS" pitchFamily="34" charset="-120"/>
               </a:rPr>
-              <a:t>care</a:t>
+              <a:t>fear</a:t>
             </a:r>
             <a:endParaRPr lang="en-US" sz="1300" dirty="0"/>
           </a:p>
@@ -9962,7 +9931,7 @@
                 <a:ea typeface="Calibri" pitchFamily="34" charset="-122"/>
                 <a:cs typeface="Calibri" pitchFamily="34" charset="-120"/>
               </a:rPr>
-              <a:t>attention, worry</a:t>
+              <a:t>to be afraid</a:t>
             </a:r>
             <a:endParaRPr lang="en-US" sz="850" dirty="0"/>
           </a:p>
@@ -10233,7 +10202,7 @@
                 <a:ea typeface="Trebuchet MS" pitchFamily="34" charset="-122"/>
                 <a:cs typeface="Trebuchet MS" pitchFamily="34" charset="-120"/>
               </a:rPr>
-              <a:t>care</a:t>
+              <a:t>fear</a:t>
             </a:r>
             <a:endParaRPr lang="en-US" sz="1400" dirty="0"/>
           </a:p>
@@ -10419,11 +10388,11 @@
         <p:spPr>
           <a:xfrm>
             <a:off x="1874520" y="4096512"/>
-            <a:ext cx="6903720" cy="804672"/>
+            <a:ext cx="6903720" cy="658368"/>
           </a:xfrm>
           <a:prstGeom prst="rect">
             <a:avLst>
-              <a:gd name="adj" fmla="val 6818"/>
+              <a:gd name="adj" fmla="val 8333"/>
             </a:avLst>
           </a:prstGeom>
           <a:solidFill>
@@ -10446,11 +10415,11 @@
         <p:spPr>
           <a:xfrm>
             <a:off x="2427732" y="4169664"/>
-            <a:ext cx="685800" cy="384048"/>
+            <a:ext cx="685800" cy="475488"/>
           </a:xfrm>
           <a:prstGeom prst="rect">
             <a:avLst>
-              <a:gd name="adj" fmla="val 9524"/>
+              <a:gd name="adj" fmla="val 7692"/>
             </a:avLst>
           </a:prstGeom>
           <a:solidFill>
@@ -10473,7 +10442,7 @@
         <p:spPr>
           <a:xfrm>
             <a:off x="2427732" y="4169664"/>
-            <a:ext cx="685800" cy="384048"/>
+            <a:ext cx="685800" cy="475488"/>
           </a:xfrm>
           <a:prstGeom prst="rect">
             <a:avLst/>
@@ -10497,7 +10466,7 @@
                 <a:ea typeface="Trebuchet MS" pitchFamily="34" charset="-122"/>
                 <a:cs typeface="Trebuchet MS" pitchFamily="34" charset="-120"/>
               </a:rPr>
-              <a:t>c</a:t>
+              <a:t>f</a:t>
             </a:r>
             <a:endParaRPr lang="en-US" sz="900" dirty="0"/>
           </a:p>
@@ -10505,57 +10474,18 @@
       </p:sp>
       <p:sp>
         <p:nvSpPr>
-          <p:cNvPr id="35" name="Text 33"/>
-          <p:cNvSpPr/>
-          <p:nvPr/>
-        </p:nvSpPr>
-        <p:spPr>
-          <a:xfrm>
-            <a:off x="2427732" y="4572000"/>
-            <a:ext cx="685800" cy="219456"/>
-          </a:xfrm>
-          <a:prstGeom prst="rect">
-            <a:avLst/>
-          </a:prstGeom>
-          <a:noFill/>
-          <a:ln/>
-        </p:spPr>
-        <p:txBody>
-          <a:bodyPr wrap="square" lIns="0" tIns="0" rIns="0" bIns="0" rtlCol="0" anchor="t"/>
-          <a:lstStyle/>
-          <a:p>
-            <a:pPr algn="ctr" indent="0" marL="0">
-              <a:buNone/>
-            </a:pPr>
-            <a:r>
-              <a:rPr lang="en-US" sz="750" i="1" dirty="0">
-                <a:solidFill>
-                  <a:srgbClr val="94A3B8"/>
-                </a:solidFill>
-                <a:latin typeface="Calibri" pitchFamily="34" charset="0"/>
-                <a:ea typeface="Calibri" pitchFamily="34" charset="-122"/>
-                <a:cs typeface="Calibri" pitchFamily="34" charset="-120"/>
-              </a:rPr>
-              <a:t>/k/</a:t>
-            </a:r>
-            <a:endParaRPr lang="en-US" sz="750" dirty="0"/>
-          </a:p>
-        </p:txBody>
-      </p:sp>
-      <p:sp>
-        <p:nvSpPr>
-          <p:cNvPr id="36" name="Shape 34"/>
+          <p:cNvPr id="35" name="Shape 33"/>
           <p:cNvSpPr/>
           <p:nvPr/>
         </p:nvSpPr>
         <p:spPr>
           <a:xfrm>
             <a:off x="3639312" y="4169664"/>
-            <a:ext cx="685800" cy="384048"/>
+            <a:ext cx="685800" cy="475488"/>
           </a:xfrm>
           <a:prstGeom prst="rect">
             <a:avLst>
-              <a:gd name="adj" fmla="val 9524"/>
+              <a:gd name="adj" fmla="val 7692"/>
             </a:avLst>
           </a:prstGeom>
           <a:solidFill>
@@ -10571,14 +10501,14 @@
       </p:sp>
       <p:sp>
         <p:nvSpPr>
-          <p:cNvPr id="37" name="Text 35"/>
+          <p:cNvPr id="36" name="Text 34"/>
           <p:cNvSpPr/>
           <p:nvPr/>
         </p:nvSpPr>
         <p:spPr>
           <a:xfrm>
             <a:off x="3639312" y="4169664"/>
-            <a:ext cx="685800" cy="384048"/>
+            <a:ext cx="685800" cy="475488"/>
           </a:xfrm>
           <a:prstGeom prst="rect">
             <a:avLst/>
@@ -10602,7 +10532,7 @@
                 <a:ea typeface="Trebuchet MS" pitchFamily="34" charset="-122"/>
                 <a:cs typeface="Trebuchet MS" pitchFamily="34" charset="-120"/>
               </a:rPr>
-              <a:t>are</a:t>
+              <a:t>ear</a:t>
             </a:r>
             <a:endParaRPr lang="en-US" sz="900" dirty="0"/>
           </a:p>
@@ -10610,18 +10540,18 @@
       </p:sp>
       <p:sp>
         <p:nvSpPr>
-          <p:cNvPr id="38" name="Shape 36"/>
+          <p:cNvPr id="37" name="Shape 35"/>
           <p:cNvSpPr/>
           <p:nvPr/>
         </p:nvSpPr>
         <p:spPr>
           <a:xfrm>
             <a:off x="4850892" y="4169664"/>
-            <a:ext cx="685800" cy="384048"/>
+            <a:ext cx="685800" cy="475488"/>
           </a:xfrm>
           <a:prstGeom prst="rect">
             <a:avLst>
-              <a:gd name="adj" fmla="val 9524"/>
+              <a:gd name="adj" fmla="val 7692"/>
             </a:avLst>
           </a:prstGeom>
           <a:solidFill>
@@ -10637,14 +10567,14 @@
       </p:sp>
       <p:sp>
         <p:nvSpPr>
-          <p:cNvPr id="39" name="Text 37"/>
+          <p:cNvPr id="38" name="Text 36"/>
           <p:cNvSpPr/>
           <p:nvPr/>
         </p:nvSpPr>
         <p:spPr>
           <a:xfrm>
             <a:off x="4850892" y="4169664"/>
-            <a:ext cx="685800" cy="384048"/>
+            <a:ext cx="685800" cy="475488"/>
           </a:xfrm>
           <a:prstGeom prst="rect">
             <a:avLst/>
@@ -10676,18 +10606,18 @@
       </p:sp>
       <p:sp>
         <p:nvSpPr>
-          <p:cNvPr id="40" name="Shape 38"/>
+          <p:cNvPr id="39" name="Shape 37"/>
           <p:cNvSpPr/>
           <p:nvPr/>
         </p:nvSpPr>
         <p:spPr>
           <a:xfrm>
             <a:off x="6062472" y="4169664"/>
-            <a:ext cx="685800" cy="384048"/>
+            <a:ext cx="685800" cy="475488"/>
           </a:xfrm>
           <a:prstGeom prst="rect">
             <a:avLst>
-              <a:gd name="adj" fmla="val 9524"/>
+              <a:gd name="adj" fmla="val 7692"/>
             </a:avLst>
           </a:prstGeom>
           <a:solidFill>
@@ -10703,14 +10633,14 @@
       </p:sp>
       <p:sp>
         <p:nvSpPr>
-          <p:cNvPr id="41" name="Text 39"/>
+          <p:cNvPr id="40" name="Text 38"/>
           <p:cNvSpPr/>
           <p:nvPr/>
         </p:nvSpPr>
         <p:spPr>
           <a:xfrm>
             <a:off x="6062472" y="4169664"/>
-            <a:ext cx="685800" cy="384048"/>
+            <a:ext cx="685800" cy="475488"/>
           </a:xfrm>
           <a:prstGeom prst="rect">
             <a:avLst/>
@@ -10742,18 +10672,18 @@
       </p:sp>
       <p:sp>
         <p:nvSpPr>
-          <p:cNvPr id="42" name="Shape 40"/>
+          <p:cNvPr id="41" name="Shape 39"/>
           <p:cNvSpPr/>
           <p:nvPr/>
         </p:nvSpPr>
         <p:spPr>
           <a:xfrm>
             <a:off x="7274052" y="4169664"/>
-            <a:ext cx="685800" cy="384048"/>
+            <a:ext cx="685800" cy="475488"/>
           </a:xfrm>
           <a:prstGeom prst="rect">
             <a:avLst>
-              <a:gd name="adj" fmla="val 9524"/>
+              <a:gd name="adj" fmla="val 7692"/>
             </a:avLst>
           </a:prstGeom>
           <a:solidFill>
@@ -10769,14 +10699,14 @@
       </p:sp>
       <p:sp>
         <p:nvSpPr>
-          <p:cNvPr id="43" name="Text 41"/>
+          <p:cNvPr id="42" name="Text 40"/>
           <p:cNvSpPr/>
           <p:nvPr/>
         </p:nvSpPr>
         <p:spPr>
           <a:xfrm>
             <a:off x="7274052" y="4169664"/>
-            <a:ext cx="685800" cy="384048"/>
+            <a:ext cx="685800" cy="475488"/>
           </a:xfrm>
           <a:prstGeom prst="rect">
             <a:avLst/>
@@ -11231,7 +11161,7 @@
                 <a:ea typeface="Trebuchet MS" pitchFamily="34" charset="-122"/>
                 <a:cs typeface="Trebuchet MS" pitchFamily="34" charset="-120"/>
               </a:rPr>
-              <a:t>speechless</a:t>
+              <a:t>helpless</a:t>
             </a:r>
             <a:endParaRPr lang="en-US" sz="2800" dirty="0"/>
           </a:p>
@@ -12058,7 +11988,7 @@
                 <a:ea typeface="Trebuchet MS" pitchFamily="34" charset="-122"/>
                 <a:cs typeface="Trebuchet MS" pitchFamily="34" charset="-120"/>
               </a:rPr>
-              <a:t>speechless</a:t>
+              <a:t>helpless</a:t>
             </a:r>
             <a:endParaRPr lang="en-US" sz="2800" dirty="0"/>
           </a:p>
@@ -12197,7 +12127,7 @@
                 <a:ea typeface="Trebuchet MS" pitchFamily="34" charset="-122"/>
                 <a:cs typeface="Trebuchet MS" pitchFamily="34" charset="-120"/>
               </a:rPr>
-              <a:t>speech</a:t>
+              <a:t>help</a:t>
             </a:r>
             <a:endParaRPr lang="en-US" sz="1300" dirty="0"/>
           </a:p>
@@ -12236,7 +12166,7 @@
                 <a:ea typeface="Calibri" pitchFamily="34" charset="-122"/>
                 <a:cs typeface="Calibri" pitchFamily="34" charset="-120"/>
               </a:rPr>
-              <a:t>spoken words</a:t>
+              <a:t>to assist</a:t>
             </a:r>
             <a:endParaRPr lang="en-US" sz="850" dirty="0"/>
           </a:p>
@@ -13043,7 +12973,7 @@
                 <a:ea typeface="Trebuchet MS" pitchFamily="34" charset="-122"/>
                 <a:cs typeface="Trebuchet MS" pitchFamily="34" charset="-120"/>
               </a:rPr>
-              <a:t>speechless</a:t>
+              <a:t>helpless</a:t>
             </a:r>
             <a:endParaRPr lang="en-US" sz="2800" dirty="0"/>
           </a:p>
@@ -13182,7 +13112,7 @@
                 <a:ea typeface="Trebuchet MS" pitchFamily="34" charset="-122"/>
                 <a:cs typeface="Trebuchet MS" pitchFamily="34" charset="-120"/>
               </a:rPr>
-              <a:t>speech</a:t>
+              <a:t>help</a:t>
             </a:r>
             <a:endParaRPr lang="en-US" sz="1300" dirty="0"/>
           </a:p>
@@ -13221,7 +13151,7 @@
                 <a:ea typeface="Calibri" pitchFamily="34" charset="-122"/>
                 <a:cs typeface="Calibri" pitchFamily="34" charset="-120"/>
               </a:rPr>
-              <a:t>spoken words</a:t>
+              <a:t>to assist</a:t>
             </a:r>
             <a:endParaRPr lang="en-US" sz="850" dirty="0"/>
           </a:p>
@@ -13492,7 +13422,7 @@
                 <a:ea typeface="Trebuchet MS" pitchFamily="34" charset="-122"/>
                 <a:cs typeface="Trebuchet MS" pitchFamily="34" charset="-120"/>
               </a:rPr>
-              <a:t>speech</a:t>
+              <a:t>help</a:t>
             </a:r>
             <a:endParaRPr lang="en-US" sz="1400" dirty="0"/>
           </a:p>
@@ -14425,7 +14355,7 @@
                 <a:ea typeface="Trebuchet MS" pitchFamily="34" charset="-122"/>
                 <a:cs typeface="Trebuchet MS" pitchFamily="34" charset="-120"/>
               </a:rPr>
-              <a:t>speechless</a:t>
+              <a:t>helpless</a:t>
             </a:r>
             <a:endParaRPr lang="en-US" sz="2800" dirty="0"/>
           </a:p>
@@ -14564,7 +14494,7 @@
                 <a:ea typeface="Trebuchet MS" pitchFamily="34" charset="-122"/>
                 <a:cs typeface="Trebuchet MS" pitchFamily="34" charset="-120"/>
               </a:rPr>
-              <a:t>speech</a:t>
+              <a:t>help</a:t>
             </a:r>
             <a:endParaRPr lang="en-US" sz="1300" dirty="0"/>
           </a:p>
@@ -14603,7 +14533,7 @@
                 <a:ea typeface="Calibri" pitchFamily="34" charset="-122"/>
                 <a:cs typeface="Calibri" pitchFamily="34" charset="-120"/>
               </a:rPr>
-              <a:t>spoken words</a:t>
+              <a:t>to assist</a:t>
             </a:r>
             <a:endParaRPr lang="en-US" sz="850" dirty="0"/>
           </a:p>
@@ -14874,7 +14804,7 @@
                 <a:ea typeface="Trebuchet MS" pitchFamily="34" charset="-122"/>
                 <a:cs typeface="Trebuchet MS" pitchFamily="34" charset="-120"/>
               </a:rPr>
-              <a:t>speech</a:t>
+              <a:t>help</a:t>
             </a:r>
             <a:endParaRPr lang="en-US" sz="1400" dirty="0"/>
           </a:p>
@@ -15086,7 +15016,7 @@
         </p:nvSpPr>
         <p:spPr>
           <a:xfrm>
-            <a:off x="2254649" y="4169664"/>
+            <a:off x="2124837" y="4169664"/>
             <a:ext cx="685800" cy="475488"/>
           </a:xfrm>
           <a:prstGeom prst="rect">
@@ -15113,7 +15043,7 @@
         </p:nvSpPr>
         <p:spPr>
           <a:xfrm>
-            <a:off x="2254649" y="4169664"/>
+            <a:off x="2124837" y="4169664"/>
             <a:ext cx="685800" cy="475488"/>
           </a:xfrm>
           <a:prstGeom prst="rect">
@@ -15138,7 +15068,7 @@
                 <a:ea typeface="Trebuchet MS" pitchFamily="34" charset="-122"/>
                 <a:cs typeface="Trebuchet MS" pitchFamily="34" charset="-120"/>
               </a:rPr>
-              <a:t>sp</a:t>
+              <a:t>h</a:t>
             </a:r>
             <a:endParaRPr lang="en-US" sz="900" dirty="0"/>
           </a:p>
@@ -15152,7 +15082,7 @@
         </p:nvSpPr>
         <p:spPr>
           <a:xfrm>
-            <a:off x="3293146" y="4169664"/>
+            <a:off x="3033522" y="4169664"/>
             <a:ext cx="685800" cy="475488"/>
           </a:xfrm>
           <a:prstGeom prst="rect">
@@ -15179,7 +15109,7 @@
         </p:nvSpPr>
         <p:spPr>
           <a:xfrm>
-            <a:off x="3293146" y="4169664"/>
+            <a:off x="3033522" y="4169664"/>
             <a:ext cx="685800" cy="475488"/>
           </a:xfrm>
           <a:prstGeom prst="rect">
@@ -15204,7 +15134,7 @@
                 <a:ea typeface="Trebuchet MS" pitchFamily="34" charset="-122"/>
                 <a:cs typeface="Trebuchet MS" pitchFamily="34" charset="-120"/>
               </a:rPr>
-              <a:t>ee</a:t>
+              <a:t>e</a:t>
             </a:r>
             <a:endParaRPr lang="en-US" sz="900" dirty="0"/>
           </a:p>
@@ -15218,7 +15148,7 @@
         </p:nvSpPr>
         <p:spPr>
           <a:xfrm>
-            <a:off x="4331643" y="4169664"/>
+            <a:off x="3942207" y="4169664"/>
             <a:ext cx="685800" cy="475488"/>
           </a:xfrm>
           <a:prstGeom prst="rect">
@@ -15245,7 +15175,7 @@
         </p:nvSpPr>
         <p:spPr>
           <a:xfrm>
-            <a:off x="4331643" y="4169664"/>
+            <a:off x="3942207" y="4169664"/>
             <a:ext cx="685800" cy="475488"/>
           </a:xfrm>
           <a:prstGeom prst="rect">
@@ -15270,7 +15200,7 @@
                 <a:ea typeface="Trebuchet MS" pitchFamily="34" charset="-122"/>
                 <a:cs typeface="Trebuchet MS" pitchFamily="34" charset="-120"/>
               </a:rPr>
-              <a:t>ch</a:t>
+              <a:t>l</a:t>
             </a:r>
             <a:endParaRPr lang="en-US" sz="900" dirty="0"/>
           </a:p>
@@ -15284,7 +15214,7 @@
         </p:nvSpPr>
         <p:spPr>
           <a:xfrm>
-            <a:off x="5370141" y="4169664"/>
+            <a:off x="4850892" y="4169664"/>
             <a:ext cx="685800" cy="475488"/>
           </a:xfrm>
           <a:prstGeom prst="rect">
@@ -15311,7 +15241,7 @@
         </p:nvSpPr>
         <p:spPr>
           <a:xfrm>
-            <a:off x="5370141" y="4169664"/>
+            <a:off x="4850892" y="4169664"/>
             <a:ext cx="685800" cy="475488"/>
           </a:xfrm>
           <a:prstGeom prst="rect">
@@ -15336,7 +15266,7 @@
                 <a:ea typeface="Trebuchet MS" pitchFamily="34" charset="-122"/>
                 <a:cs typeface="Trebuchet MS" pitchFamily="34" charset="-120"/>
               </a:rPr>
-              <a:t>l</a:t>
+              <a:t>p</a:t>
             </a:r>
             <a:endParaRPr lang="en-US" sz="900" dirty="0"/>
           </a:p>
@@ -15350,7 +15280,7 @@
         </p:nvSpPr>
         <p:spPr>
           <a:xfrm>
-            <a:off x="6408638" y="4169664"/>
+            <a:off x="5759577" y="4169664"/>
             <a:ext cx="685800" cy="475488"/>
           </a:xfrm>
           <a:prstGeom prst="rect">
@@ -15377,7 +15307,7 @@
         </p:nvSpPr>
         <p:spPr>
           <a:xfrm>
-            <a:off x="6408638" y="4169664"/>
+            <a:off x="5759577" y="4169664"/>
             <a:ext cx="685800" cy="475488"/>
           </a:xfrm>
           <a:prstGeom prst="rect">
@@ -15402,7 +15332,7 @@
                 <a:ea typeface="Trebuchet MS" pitchFamily="34" charset="-122"/>
                 <a:cs typeface="Trebuchet MS" pitchFamily="34" charset="-120"/>
               </a:rPr>
-              <a:t>e</a:t>
+              <a:t>l</a:t>
             </a:r>
             <a:endParaRPr lang="en-US" sz="900" dirty="0"/>
           </a:p>
@@ -15416,7 +15346,7 @@
         </p:nvSpPr>
         <p:spPr>
           <a:xfrm>
-            <a:off x="7447135" y="4169664"/>
+            <a:off x="6668262" y="4169664"/>
             <a:ext cx="685800" cy="475488"/>
           </a:xfrm>
           <a:prstGeom prst="rect">
@@ -15443,7 +15373,73 @@
         </p:nvSpPr>
         <p:spPr>
           <a:xfrm>
-            <a:off x="7447135" y="4169664"/>
+            <a:off x="6668262" y="4169664"/>
+            <a:ext cx="685800" cy="475488"/>
+          </a:xfrm>
+          <a:prstGeom prst="rect">
+            <a:avLst/>
+          </a:prstGeom>
+          <a:noFill/>
+          <a:ln/>
+        </p:spPr>
+        <p:txBody>
+          <a:bodyPr wrap="square" lIns="0" tIns="0" rIns="0" bIns="0" rtlCol="0" anchor="ctr"/>
+          <a:lstStyle/>
+          <a:p>
+            <a:pPr algn="ctr" indent="0" marL="0">
+              <a:buNone/>
+            </a:pPr>
+            <a:r>
+              <a:rPr lang="en-US" sz="900" b="1" dirty="0">
+                <a:solidFill>
+                  <a:srgbClr val="9D174D"/>
+                </a:solidFill>
+                <a:latin typeface="Trebuchet MS" pitchFamily="34" charset="0"/>
+                <a:ea typeface="Trebuchet MS" pitchFamily="34" charset="-122"/>
+                <a:cs typeface="Trebuchet MS" pitchFamily="34" charset="-120"/>
+              </a:rPr>
+              <a:t>e</a:t>
+            </a:r>
+            <a:endParaRPr lang="en-US" sz="900" dirty="0"/>
+          </a:p>
+        </p:txBody>
+      </p:sp>
+      <p:sp>
+        <p:nvSpPr>
+          <p:cNvPr id="45" name="Shape 43"/>
+          <p:cNvSpPr/>
+          <p:nvPr/>
+        </p:nvSpPr>
+        <p:spPr>
+          <a:xfrm>
+            <a:off x="7576947" y="4169664"/>
+            <a:ext cx="685800" cy="475488"/>
+          </a:xfrm>
+          <a:prstGeom prst="rect">
+            <a:avLst>
+              <a:gd name="adj" fmla="val 7692"/>
+            </a:avLst>
+          </a:prstGeom>
+          <a:solidFill>
+            <a:srgbClr val="FFFFFF"/>
+          </a:solidFill>
+          <a:ln w="12700">
+            <a:solidFill>
+              <a:srgbClr val="DB2777"/>
+            </a:solidFill>
+            <a:prstDash val="solid"/>
+          </a:ln>
+        </p:spPr>
+      </p:sp>
+      <p:sp>
+        <p:nvSpPr>
+          <p:cNvPr id="46" name="Text 44"/>
+          <p:cNvSpPr/>
+          <p:nvPr/>
+        </p:nvSpPr>
+        <p:spPr>
+          <a:xfrm>
+            <a:off x="7576947" y="4169664"/>
             <a:ext cx="685800" cy="475488"/>
           </a:xfrm>
           <a:prstGeom prst="rect">
@@ -16811,7 +16807,7 @@
                 <a:ea typeface="Calibri" pitchFamily="34" charset="-122"/>
                 <a:cs typeface="Calibri" pitchFamily="34" charset="-120"/>
               </a:rPr>
-              <a:t>fearless</a:t>
+              <a:t>endless</a:t>
             </a:r>
             <a:pPr algn="l" indent="0" marL="0">
               <a:buNone/>
@@ -16825,7 +16821,7 @@
                 <a:ea typeface="Calibri" pitchFamily="34" charset="-122"/>
                 <a:cs typeface="Calibri" pitchFamily="34" charset="-120"/>
               </a:rPr>
-              <a:t> and </a:t>
+              <a:t> storm made the sailors feel </a:t>
             </a:r>
             <a:pPr algn="l" indent="0" marL="0">
               <a:buNone/>
@@ -16842,7 +16838,7 @@
                 <a:ea typeface="Calibri" pitchFamily="34" charset="-122"/>
                 <a:cs typeface="Calibri" pitchFamily="34" charset="-120"/>
               </a:rPr>
-              <a:t>tireless</a:t>
+              <a:t>powerless</a:t>
             </a:r>
             <a:pPr algn="l" indent="0" marL="0">
               <a:buNone/>
@@ -16856,7 +16852,7 @@
                 <a:ea typeface="Calibri" pitchFamily="34" charset="-122"/>
                 <a:cs typeface="Calibri" pitchFamily="34" charset="-120"/>
               </a:rPr>
-              <a:t> explorer felt </a:t>
+              <a:t>, and the captain was </a:t>
             </a:r>
             <a:pPr algn="l" indent="0" marL="0">
               <a:buNone/>
@@ -16873,7 +16869,7 @@
                 <a:ea typeface="Calibri" pitchFamily="34" charset="-122"/>
                 <a:cs typeface="Calibri" pitchFamily="34" charset="-120"/>
               </a:rPr>
-              <a:t>helpless</a:t>
+              <a:t>speechless</a:t>
             </a:r>
             <a:pPr algn="l" indent="0" marL="0">
               <a:buNone/>
@@ -16887,7 +16883,7 @@
                 <a:ea typeface="Calibri" pitchFamily="34" charset="-122"/>
                 <a:cs typeface="Calibri" pitchFamily="34" charset="-120"/>
               </a:rPr>
-              <a:t> when the storm destroyed her tent.</a:t>
+              <a:t> when the mast snapped.</a:t>
             </a:r>
             <a:endParaRPr lang="en-US" sz="1800" dirty="0"/>
           </a:p>
@@ -17042,7 +17038,7 @@
                 <a:ea typeface="Trebuchet MS" pitchFamily="34" charset="-122"/>
                 <a:cs typeface="Trebuchet MS" pitchFamily="34" charset="-120"/>
               </a:rPr>
-              <a:t>fearless</a:t>
+              <a:t>endless</a:t>
             </a:r>
             <a:endParaRPr lang="en-US" sz="1400" dirty="0"/>
           </a:p>
@@ -17170,7 +17166,7 @@
                 <a:ea typeface="Trebuchet MS" pitchFamily="34" charset="-122"/>
                 <a:cs typeface="Trebuchet MS" pitchFamily="34" charset="-120"/>
               </a:rPr>
-              <a:t>tireless</a:t>
+              <a:t>powerless</a:t>
             </a:r>
             <a:endParaRPr lang="en-US" sz="1400" dirty="0"/>
           </a:p>
@@ -17298,7 +17294,7 @@
                 <a:ea typeface="Trebuchet MS" pitchFamily="34" charset="-122"/>
                 <a:cs typeface="Trebuchet MS" pitchFamily="34" charset="-120"/>
               </a:rPr>
-              <a:t>helpless</a:t>
+              <a:t>speechless</a:t>
             </a:r>
             <a:endParaRPr lang="en-US" sz="1400" dirty="0"/>
           </a:p>
@@ -17768,7 +17764,7 @@
                 <a:ea typeface="Trebuchet MS" pitchFamily="34" charset="-122"/>
                 <a:cs typeface="Trebuchet MS" pitchFamily="34" charset="-120"/>
               </a:rPr>
-              <a:t>fearless</a:t>
+              <a:t>endless</a:t>
             </a:r>
             <a:endParaRPr lang="en-US" sz="2800" dirty="0"/>
           </a:p>
@@ -18595,7 +18591,7 @@
                 <a:ea typeface="Trebuchet MS" pitchFamily="34" charset="-122"/>
                 <a:cs typeface="Trebuchet MS" pitchFamily="34" charset="-120"/>
               </a:rPr>
-              <a:t>fearless</a:t>
+              <a:t>endless</a:t>
             </a:r>
             <a:endParaRPr lang="en-US" sz="2800" dirty="0"/>
           </a:p>
@@ -18734,7 +18730,7 @@
                 <a:ea typeface="Trebuchet MS" pitchFamily="34" charset="-122"/>
                 <a:cs typeface="Trebuchet MS" pitchFamily="34" charset="-120"/>
               </a:rPr>
-              <a:t>fear</a:t>
+              <a:t>end</a:t>
             </a:r>
             <a:endParaRPr lang="en-US" sz="1300" dirty="0"/>
           </a:p>
@@ -18773,7 +18769,7 @@
                 <a:ea typeface="Calibri" pitchFamily="34" charset="-122"/>
                 <a:cs typeface="Calibri" pitchFamily="34" charset="-120"/>
               </a:rPr>
-              <a:t>feeling of being scared</a:t>
+              <a:t>the finish or last point</a:t>
             </a:r>
             <a:endParaRPr lang="en-US" sz="850" dirty="0"/>
           </a:p>
@@ -19580,7 +19576,7 @@
                 <a:ea typeface="Trebuchet MS" pitchFamily="34" charset="-122"/>
                 <a:cs typeface="Trebuchet MS" pitchFamily="34" charset="-120"/>
               </a:rPr>
-              <a:t>fearless</a:t>
+              <a:t>endless</a:t>
             </a:r>
             <a:endParaRPr lang="en-US" sz="2800" dirty="0"/>
           </a:p>
@@ -19719,7 +19715,7 @@
                 <a:ea typeface="Trebuchet MS" pitchFamily="34" charset="-122"/>
                 <a:cs typeface="Trebuchet MS" pitchFamily="34" charset="-120"/>
               </a:rPr>
-              <a:t>fear</a:t>
+              <a:t>end</a:t>
             </a:r>
             <a:endParaRPr lang="en-US" sz="1300" dirty="0"/>
           </a:p>
@@ -19758,7 +19754,7 @@
                 <a:ea typeface="Calibri" pitchFamily="34" charset="-122"/>
                 <a:cs typeface="Calibri" pitchFamily="34" charset="-120"/>
               </a:rPr>
-              <a:t>feeling of being scared</a:t>
+              <a:t>the finish or last point</a:t>
             </a:r>
             <a:endParaRPr lang="en-US" sz="850" dirty="0"/>
           </a:p>
@@ -20029,7 +20025,7 @@
                 <a:ea typeface="Trebuchet MS" pitchFamily="34" charset="-122"/>
                 <a:cs typeface="Trebuchet MS" pitchFamily="34" charset="-120"/>
               </a:rPr>
-              <a:t>fear</a:t>
+              <a:t>end</a:t>
             </a:r>
             <a:endParaRPr lang="en-US" sz="1400" dirty="0"/>
           </a:p>
@@ -20697,7 +20693,7 @@
                 <a:ea typeface="Trebuchet MS" pitchFamily="34" charset="-122"/>
                 <a:cs typeface="Trebuchet MS" pitchFamily="34" charset="-120"/>
               </a:rPr>
-              <a:t>fearless</a:t>
+              <a:t>endless</a:t>
             </a:r>
             <a:endParaRPr lang="en-US" sz="2800" dirty="0"/>
           </a:p>
@@ -20836,7 +20832,7 @@
                 <a:ea typeface="Trebuchet MS" pitchFamily="34" charset="-122"/>
                 <a:cs typeface="Trebuchet MS" pitchFamily="34" charset="-120"/>
               </a:rPr>
-              <a:t>fear</a:t>
+              <a:t>end</a:t>
             </a:r>
             <a:endParaRPr lang="en-US" sz="1300" dirty="0"/>
           </a:p>
@@ -20875,7 +20871,7 @@
                 <a:ea typeface="Calibri" pitchFamily="34" charset="-122"/>
                 <a:cs typeface="Calibri" pitchFamily="34" charset="-120"/>
               </a:rPr>
-              <a:t>feeling of being scared</a:t>
+              <a:t>the finish or last point</a:t>
             </a:r>
             <a:endParaRPr lang="en-US" sz="850" dirty="0"/>
           </a:p>
@@ -21146,7 +21142,7 @@
                 <a:ea typeface="Trebuchet MS" pitchFamily="34" charset="-122"/>
                 <a:cs typeface="Trebuchet MS" pitchFamily="34" charset="-120"/>
               </a:rPr>
-              <a:t>fear</a:t>
+              <a:t>end</a:t>
             </a:r>
             <a:endParaRPr lang="en-US" sz="1400" dirty="0"/>
           </a:p>
@@ -21358,7 +21354,7 @@
         </p:nvSpPr>
         <p:spPr>
           <a:xfrm>
-            <a:off x="2427732" y="4169664"/>
+            <a:off x="2254649" y="4169664"/>
             <a:ext cx="685800" cy="475488"/>
           </a:xfrm>
           <a:prstGeom prst="rect">
@@ -21385,7 +21381,7 @@
         </p:nvSpPr>
         <p:spPr>
           <a:xfrm>
-            <a:off x="2427732" y="4169664"/>
+            <a:off x="2254649" y="4169664"/>
             <a:ext cx="685800" cy="475488"/>
           </a:xfrm>
           <a:prstGeom prst="rect">
@@ -21410,7 +21406,7 @@
                 <a:ea typeface="Trebuchet MS" pitchFamily="34" charset="-122"/>
                 <a:cs typeface="Trebuchet MS" pitchFamily="34" charset="-120"/>
               </a:rPr>
-              <a:t>f</a:t>
+              <a:t>e</a:t>
             </a:r>
             <a:endParaRPr lang="en-US" sz="900" dirty="0"/>
           </a:p>
@@ -21424,7 +21420,7 @@
         </p:nvSpPr>
         <p:spPr>
           <a:xfrm>
-            <a:off x="3639312" y="4169664"/>
+            <a:off x="3293146" y="4169664"/>
             <a:ext cx="685800" cy="475488"/>
           </a:xfrm>
           <a:prstGeom prst="rect">
@@ -21451,7 +21447,7 @@
         </p:nvSpPr>
         <p:spPr>
           <a:xfrm>
-            <a:off x="3639312" y="4169664"/>
+            <a:off x="3293146" y="4169664"/>
             <a:ext cx="685800" cy="475488"/>
           </a:xfrm>
           <a:prstGeom prst="rect">
@@ -21476,7 +21472,7 @@
                 <a:ea typeface="Trebuchet MS" pitchFamily="34" charset="-122"/>
                 <a:cs typeface="Trebuchet MS" pitchFamily="34" charset="-120"/>
               </a:rPr>
-              <a:t>ear</a:t>
+              <a:t>n</a:t>
             </a:r>
             <a:endParaRPr lang="en-US" sz="900" dirty="0"/>
           </a:p>
@@ -21490,7 +21486,7 @@
         </p:nvSpPr>
         <p:spPr>
           <a:xfrm>
-            <a:off x="4850892" y="4169664"/>
+            <a:off x="4331643" y="4169664"/>
             <a:ext cx="685800" cy="475488"/>
           </a:xfrm>
           <a:prstGeom prst="rect">
@@ -21517,7 +21513,7 @@
         </p:nvSpPr>
         <p:spPr>
           <a:xfrm>
-            <a:off x="4850892" y="4169664"/>
+            <a:off x="4331643" y="4169664"/>
             <a:ext cx="685800" cy="475488"/>
           </a:xfrm>
           <a:prstGeom prst="rect">
@@ -21542,7 +21538,7 @@
                 <a:ea typeface="Trebuchet MS" pitchFamily="34" charset="-122"/>
                 <a:cs typeface="Trebuchet MS" pitchFamily="34" charset="-120"/>
               </a:rPr>
-              <a:t>l</a:t>
+              <a:t>d</a:t>
             </a:r>
             <a:endParaRPr lang="en-US" sz="900" dirty="0"/>
           </a:p>
@@ -21556,7 +21552,7 @@
         </p:nvSpPr>
         <p:spPr>
           <a:xfrm>
-            <a:off x="6062472" y="4169664"/>
+            <a:off x="5370141" y="4169664"/>
             <a:ext cx="685800" cy="475488"/>
           </a:xfrm>
           <a:prstGeom prst="rect">
@@ -21583,7 +21579,7 @@
         </p:nvSpPr>
         <p:spPr>
           <a:xfrm>
-            <a:off x="6062472" y="4169664"/>
+            <a:off x="5370141" y="4169664"/>
             <a:ext cx="685800" cy="475488"/>
           </a:xfrm>
           <a:prstGeom prst="rect">
@@ -21608,7 +21604,7 @@
                 <a:ea typeface="Trebuchet MS" pitchFamily="34" charset="-122"/>
                 <a:cs typeface="Trebuchet MS" pitchFamily="34" charset="-120"/>
               </a:rPr>
-              <a:t>e</a:t>
+              <a:t>l</a:t>
             </a:r>
             <a:endParaRPr lang="en-US" sz="900" dirty="0"/>
           </a:p>
@@ -21622,7 +21618,7 @@
         </p:nvSpPr>
         <p:spPr>
           <a:xfrm>
-            <a:off x="7274052" y="4169664"/>
+            <a:off x="6408638" y="4169664"/>
             <a:ext cx="685800" cy="475488"/>
           </a:xfrm>
           <a:prstGeom prst="rect">
@@ -21649,7 +21645,73 @@
         </p:nvSpPr>
         <p:spPr>
           <a:xfrm>
-            <a:off x="7274052" y="4169664"/>
+            <a:off x="6408638" y="4169664"/>
+            <a:ext cx="685800" cy="475488"/>
+          </a:xfrm>
+          <a:prstGeom prst="rect">
+            <a:avLst/>
+          </a:prstGeom>
+          <a:noFill/>
+          <a:ln/>
+        </p:spPr>
+        <p:txBody>
+          <a:bodyPr wrap="square" lIns="0" tIns="0" rIns="0" bIns="0" rtlCol="0" anchor="ctr"/>
+          <a:lstStyle/>
+          <a:p>
+            <a:pPr algn="ctr" indent="0" marL="0">
+              <a:buNone/>
+            </a:pPr>
+            <a:r>
+              <a:rPr lang="en-US" sz="900" b="1" dirty="0">
+                <a:solidFill>
+                  <a:srgbClr val="9D174D"/>
+                </a:solidFill>
+                <a:latin typeface="Trebuchet MS" pitchFamily="34" charset="0"/>
+                <a:ea typeface="Trebuchet MS" pitchFamily="34" charset="-122"/>
+                <a:cs typeface="Trebuchet MS" pitchFamily="34" charset="-120"/>
+              </a:rPr>
+              <a:t>e</a:t>
+            </a:r>
+            <a:endParaRPr lang="en-US" sz="900" dirty="0"/>
+          </a:p>
+        </p:txBody>
+      </p:sp>
+      <p:sp>
+        <p:nvSpPr>
+          <p:cNvPr id="43" name="Shape 41"/>
+          <p:cNvSpPr/>
+          <p:nvPr/>
+        </p:nvSpPr>
+        <p:spPr>
+          <a:xfrm>
+            <a:off x="7447135" y="4169664"/>
+            <a:ext cx="685800" cy="475488"/>
+          </a:xfrm>
+          <a:prstGeom prst="rect">
+            <a:avLst>
+              <a:gd name="adj" fmla="val 7692"/>
+            </a:avLst>
+          </a:prstGeom>
+          <a:solidFill>
+            <a:srgbClr val="FFFFFF"/>
+          </a:solidFill>
+          <a:ln w="12700">
+            <a:solidFill>
+              <a:srgbClr val="DB2777"/>
+            </a:solidFill>
+            <a:prstDash val="solid"/>
+          </a:ln>
+        </p:spPr>
+      </p:sp>
+      <p:sp>
+        <p:nvSpPr>
+          <p:cNvPr id="44" name="Text 42"/>
+          <p:cNvSpPr/>
+          <p:nvPr/>
+        </p:nvSpPr>
+        <p:spPr>
+          <a:xfrm>
+            <a:off x="7447135" y="4169664"/>
             <a:ext cx="685800" cy="475488"/>
           </a:xfrm>
           <a:prstGeom prst="rect">
@@ -22105,7 +22167,7 @@
                 <a:ea typeface="Trebuchet MS" pitchFamily="34" charset="-122"/>
                 <a:cs typeface="Trebuchet MS" pitchFamily="34" charset="-120"/>
               </a:rPr>
-              <a:t>tireless</a:t>
+              <a:t>powerless</a:t>
             </a:r>
             <a:endParaRPr lang="en-US" sz="2800" dirty="0"/>
           </a:p>
@@ -22932,7 +22994,7 @@
                 <a:ea typeface="Trebuchet MS" pitchFamily="34" charset="-122"/>
                 <a:cs typeface="Trebuchet MS" pitchFamily="34" charset="-120"/>
               </a:rPr>
-              <a:t>tireless</a:t>
+              <a:t>powerless</a:t>
             </a:r>
             <a:endParaRPr lang="en-US" sz="2800" dirty="0"/>
           </a:p>
@@ -23071,7 +23133,7 @@
                 <a:ea typeface="Trebuchet MS" pitchFamily="34" charset="-122"/>
                 <a:cs typeface="Trebuchet MS" pitchFamily="34" charset="-120"/>
               </a:rPr>
-              <a:t>tire</a:t>
+              <a:t>power</a:t>
             </a:r>
             <a:endParaRPr lang="en-US" sz="1300" dirty="0"/>
           </a:p>
@@ -23110,7 +23172,7 @@
                 <a:ea typeface="Calibri" pitchFamily="34" charset="-122"/>
                 <a:cs typeface="Calibri" pitchFamily="34" charset="-120"/>
               </a:rPr>
-              <a:t>to become weary or exhausted</a:t>
+              <a:t>strength or control</a:t>
             </a:r>
             <a:endParaRPr lang="en-US" sz="850" dirty="0"/>
           </a:p>
@@ -23230,57 +23292,150 @@
       </p:sp>
       <p:sp>
         <p:nvSpPr>
-          <p:cNvPr id="22" name="Text 20"/>
-          <p:cNvSpPr/>
-          <p:nvPr/>
-        </p:nvSpPr>
-        <p:spPr>
-          <a:xfrm>
-            <a:off x="5803392" y="2752344"/>
-            <a:ext cx="1828800" cy="182880"/>
-          </a:xfrm>
-          <a:prstGeom prst="rect">
-            <a:avLst/>
-          </a:prstGeom>
-          <a:noFill/>
-          <a:ln/>
-        </p:spPr>
-        <p:txBody>
-          <a:bodyPr wrap="square" lIns="0" tIns="0" rIns="0" bIns="0" rtlCol="0" anchor="t"/>
-          <a:lstStyle/>
-          <a:p>
-            <a:pPr algn="ctr" indent="0" marL="0">
-              <a:buNone/>
-            </a:pPr>
-            <a:r>
-              <a:rPr lang="en-US" sz="700" i="1" dirty="0">
-                <a:solidFill>
-                  <a:srgbClr val="94A3B8"/>
+          <p:cNvPr id="22" name="Shape 20"/>
+          <p:cNvSpPr/>
+          <p:nvPr/>
+        </p:nvSpPr>
+        <p:spPr>
+          <a:xfrm>
+            <a:off x="365760" y="3273552"/>
+            <a:ext cx="1371600" cy="658368"/>
+          </a:xfrm>
+          <a:prstGeom prst="rect">
+            <a:avLst>
+              <a:gd name="adj" fmla="val 8333"/>
+            </a:avLst>
+          </a:prstGeom>
+          <a:solidFill>
+            <a:srgbClr val="E2E8F0"/>
+          </a:solidFill>
+          <a:ln w="12700">
+            <a:solidFill>
+              <a:srgbClr val="E2E8F0"/>
+            </a:solidFill>
+            <a:prstDash val="solid"/>
+          </a:ln>
+        </p:spPr>
+      </p:sp>
+      <p:sp>
+        <p:nvSpPr>
+          <p:cNvPr id="23" name="Text 21"/>
+          <p:cNvSpPr/>
+          <p:nvPr/>
+        </p:nvSpPr>
+        <p:spPr>
+          <a:xfrm>
+            <a:off x="365760" y="3273552"/>
+            <a:ext cx="1371600" cy="658368"/>
+          </a:xfrm>
+          <a:prstGeom prst="rect">
+            <a:avLst/>
+          </a:prstGeom>
+          <a:noFill/>
+          <a:ln/>
+        </p:spPr>
+        <p:txBody>
+          <a:bodyPr wrap="square" lIns="0" tIns="0" rIns="0" bIns="0" rtlCol="0" anchor="ctr"/>
+          <a:lstStyle/>
+          <a:p>
+            <a:pPr algn="ctr" indent="0" marL="0">
+              <a:buNone/>
+            </a:pPr>
+            <a:r>
+              <a:rPr lang="en-US" sz="1100" b="1" dirty="0">
+                <a:solidFill>
+                  <a:srgbClr val="475569"/>
+                </a:solidFill>
+                <a:latin typeface="Trebuchet MS" pitchFamily="34" charset="0"/>
+                <a:ea typeface="Trebuchet MS" pitchFamily="34" charset="-122"/>
+                <a:cs typeface="Trebuchet MS" pitchFamily="34" charset="-120"/>
+              </a:rPr>
+              <a:t>Syllables</a:t>
+            </a:r>
+            <a:endParaRPr lang="en-US" sz="1100" dirty="0"/>
+          </a:p>
+        </p:txBody>
+      </p:sp>
+      <p:sp>
+        <p:nvSpPr>
+          <p:cNvPr id="24" name="Shape 22"/>
+          <p:cNvSpPr/>
+          <p:nvPr/>
+        </p:nvSpPr>
+        <p:spPr>
+          <a:xfrm>
+            <a:off x="1874520" y="3273552"/>
+            <a:ext cx="6903720" cy="658368"/>
+          </a:xfrm>
+          <a:prstGeom prst="rect">
+            <a:avLst>
+              <a:gd name="adj" fmla="val 8333"/>
+            </a:avLst>
+          </a:prstGeom>
+          <a:solidFill>
+            <a:srgbClr val="F8FAFC"/>
+          </a:solidFill>
+          <a:ln w="12700">
+            <a:solidFill>
+              <a:srgbClr val="E2E8F0"/>
+            </a:solidFill>
+            <a:prstDash val="dash"/>
+          </a:ln>
+        </p:spPr>
+      </p:sp>
+      <p:sp>
+        <p:nvSpPr>
+          <p:cNvPr id="25" name="Text 23"/>
+          <p:cNvSpPr/>
+          <p:nvPr/>
+        </p:nvSpPr>
+        <p:spPr>
+          <a:xfrm>
+            <a:off x="1874520" y="3273552"/>
+            <a:ext cx="6903720" cy="658368"/>
+          </a:xfrm>
+          <a:prstGeom prst="rect">
+            <a:avLst/>
+          </a:prstGeom>
+          <a:noFill/>
+          <a:ln/>
+        </p:spPr>
+        <p:txBody>
+          <a:bodyPr wrap="square" rtlCol="0" anchor="ctr"/>
+          <a:lstStyle/>
+          <a:p>
+            <a:pPr algn="ctr" indent="0" marL="0">
+              <a:buNone/>
+            </a:pPr>
+            <a:r>
+              <a:rPr lang="en-US" sz="1100" i="1" dirty="0">
+                <a:solidFill>
+                  <a:srgbClr val="CBD5E1"/>
                 </a:solidFill>
                 <a:latin typeface="Calibri" pitchFamily="34" charset="0"/>
                 <a:ea typeface="Calibri" pitchFamily="34" charset="-122"/>
                 <a:cs typeface="Calibri" pitchFamily="34" charset="-120"/>
               </a:rPr>
-              <a:t>'e' dropped before suffix</a:t>
-            </a:r>
-            <a:endParaRPr lang="en-US" sz="700" dirty="0"/>
-          </a:p>
-        </p:txBody>
-      </p:sp>
-      <p:sp>
-        <p:nvSpPr>
-          <p:cNvPr id="23" name="Shape 21"/>
-          <p:cNvSpPr/>
-          <p:nvPr/>
-        </p:nvSpPr>
-        <p:spPr>
-          <a:xfrm>
-            <a:off x="365760" y="3273552"/>
-            <a:ext cx="1371600" cy="658368"/>
+              <a:t>Write here...</a:t>
+            </a:r>
+            <a:endParaRPr lang="en-US" sz="1100" dirty="0"/>
+          </a:p>
+        </p:txBody>
+      </p:sp>
+      <p:sp>
+        <p:nvSpPr>
+          <p:cNvPr id="26" name="Shape 24"/>
+          <p:cNvSpPr/>
+          <p:nvPr/>
+        </p:nvSpPr>
+        <p:spPr>
+          <a:xfrm>
+            <a:off x="365760" y="4096512"/>
+            <a:ext cx="1371600" cy="804672"/>
           </a:xfrm>
           <a:prstGeom prst="rect">
             <a:avLst>
-              <a:gd name="adj" fmla="val 8333"/>
+              <a:gd name="adj" fmla="val 6818"/>
             </a:avLst>
           </a:prstGeom>
           <a:solidFill>
@@ -23296,14 +23451,14 @@
       </p:sp>
       <p:sp>
         <p:nvSpPr>
-          <p:cNvPr id="24" name="Text 22"/>
-          <p:cNvSpPr/>
-          <p:nvPr/>
-        </p:nvSpPr>
-        <p:spPr>
-          <a:xfrm>
-            <a:off x="365760" y="3273552"/>
-            <a:ext cx="1371600" cy="658368"/>
+          <p:cNvPr id="27" name="Text 25"/>
+          <p:cNvSpPr/>
+          <p:nvPr/>
+        </p:nvSpPr>
+        <p:spPr>
+          <a:xfrm>
+            <a:off x="365760" y="4096512"/>
+            <a:ext cx="1371600" cy="804672"/>
           </a:xfrm>
           <a:prstGeom prst="rect">
             <a:avLst/>
@@ -23327,7 +23482,7 @@
                 <a:ea typeface="Trebuchet MS" pitchFamily="34" charset="-122"/>
                 <a:cs typeface="Trebuchet MS" pitchFamily="34" charset="-120"/>
               </a:rPr>
-              <a:t>Syllables</a:t>
+              <a:t>Phonemes</a:t>
             </a:r>
             <a:endParaRPr lang="en-US" sz="1100" dirty="0"/>
           </a:p>
@@ -23335,80 +23490,14 @@
       </p:sp>
       <p:sp>
         <p:nvSpPr>
-          <p:cNvPr id="25" name="Shape 23"/>
-          <p:cNvSpPr/>
-          <p:nvPr/>
-        </p:nvSpPr>
-        <p:spPr>
-          <a:xfrm>
-            <a:off x="1874520" y="3273552"/>
-            <a:ext cx="6903720" cy="658368"/>
-          </a:xfrm>
-          <a:prstGeom prst="rect">
-            <a:avLst>
-              <a:gd name="adj" fmla="val 8333"/>
-            </a:avLst>
-          </a:prstGeom>
-          <a:solidFill>
-            <a:srgbClr val="F8FAFC"/>
-          </a:solidFill>
-          <a:ln w="12700">
-            <a:solidFill>
-              <a:srgbClr val="E2E8F0"/>
-            </a:solidFill>
-            <a:prstDash val="dash"/>
-          </a:ln>
-        </p:spPr>
-      </p:sp>
-      <p:sp>
-        <p:nvSpPr>
-          <p:cNvPr id="26" name="Text 24"/>
-          <p:cNvSpPr/>
-          <p:nvPr/>
-        </p:nvSpPr>
-        <p:spPr>
-          <a:xfrm>
-            <a:off x="1874520" y="3273552"/>
-            <a:ext cx="6903720" cy="658368"/>
-          </a:xfrm>
-          <a:prstGeom prst="rect">
-            <a:avLst/>
-          </a:prstGeom>
-          <a:noFill/>
-          <a:ln/>
-        </p:spPr>
-        <p:txBody>
-          <a:bodyPr wrap="square" rtlCol="0" anchor="ctr"/>
-          <a:lstStyle/>
-          <a:p>
-            <a:pPr algn="ctr" indent="0" marL="0">
-              <a:buNone/>
-            </a:pPr>
-            <a:r>
-              <a:rPr lang="en-US" sz="1100" i="1" dirty="0">
-                <a:solidFill>
-                  <a:srgbClr val="CBD5E1"/>
-                </a:solidFill>
-                <a:latin typeface="Calibri" pitchFamily="34" charset="0"/>
-                <a:ea typeface="Calibri" pitchFamily="34" charset="-122"/>
-                <a:cs typeface="Calibri" pitchFamily="34" charset="-120"/>
-              </a:rPr>
-              <a:t>Write here...</a:t>
-            </a:r>
-            <a:endParaRPr lang="en-US" sz="1100" dirty="0"/>
-          </a:p>
-        </p:txBody>
-      </p:sp>
-      <p:sp>
-        <p:nvSpPr>
-          <p:cNvPr id="27" name="Shape 25"/>
-          <p:cNvSpPr/>
-          <p:nvPr/>
-        </p:nvSpPr>
-        <p:spPr>
-          <a:xfrm>
-            <a:off x="365760" y="4096512"/>
-            <a:ext cx="1371600" cy="804672"/>
+          <p:cNvPr id="28" name="Shape 26"/>
+          <p:cNvSpPr/>
+          <p:nvPr/>
+        </p:nvSpPr>
+        <p:spPr>
+          <a:xfrm>
+            <a:off x="1874520" y="4096512"/>
+            <a:ext cx="6903720" cy="804672"/>
           </a:xfrm>
           <a:prstGeom prst="rect">
             <a:avLst>
@@ -23416,85 +23505,19 @@
             </a:avLst>
           </a:prstGeom>
           <a:solidFill>
-            <a:srgbClr val="E2E8F0"/>
+            <a:srgbClr val="F8FAFC"/>
           </a:solidFill>
           <a:ln w="12700">
             <a:solidFill>
               <a:srgbClr val="E2E8F0"/>
             </a:solidFill>
-            <a:prstDash val="solid"/>
-          </a:ln>
-        </p:spPr>
-      </p:sp>
-      <p:sp>
-        <p:nvSpPr>
-          <p:cNvPr id="28" name="Text 26"/>
-          <p:cNvSpPr/>
-          <p:nvPr/>
-        </p:nvSpPr>
-        <p:spPr>
-          <a:xfrm>
-            <a:off x="365760" y="4096512"/>
-            <a:ext cx="1371600" cy="804672"/>
-          </a:xfrm>
-          <a:prstGeom prst="rect">
-            <a:avLst/>
-          </a:prstGeom>
-          <a:noFill/>
-          <a:ln/>
-        </p:spPr>
-        <p:txBody>
-          <a:bodyPr wrap="square" lIns="0" tIns="0" rIns="0" bIns="0" rtlCol="0" anchor="ctr"/>
-          <a:lstStyle/>
-          <a:p>
-            <a:pPr algn="ctr" indent="0" marL="0">
-              <a:buNone/>
-            </a:pPr>
-            <a:r>
-              <a:rPr lang="en-US" sz="1100" b="1" dirty="0">
-                <a:solidFill>
-                  <a:srgbClr val="475569"/>
-                </a:solidFill>
-                <a:latin typeface="Trebuchet MS" pitchFamily="34" charset="0"/>
-                <a:ea typeface="Trebuchet MS" pitchFamily="34" charset="-122"/>
-                <a:cs typeface="Trebuchet MS" pitchFamily="34" charset="-120"/>
-              </a:rPr>
-              <a:t>Phonemes</a:t>
-            </a:r>
-            <a:endParaRPr lang="en-US" sz="1100" dirty="0"/>
-          </a:p>
-        </p:txBody>
-      </p:sp>
-      <p:sp>
-        <p:nvSpPr>
-          <p:cNvPr id="29" name="Shape 27"/>
-          <p:cNvSpPr/>
-          <p:nvPr/>
-        </p:nvSpPr>
-        <p:spPr>
-          <a:xfrm>
-            <a:off x="1874520" y="4096512"/>
-            <a:ext cx="6903720" cy="804672"/>
-          </a:xfrm>
-          <a:prstGeom prst="rect">
-            <a:avLst>
-              <a:gd name="adj" fmla="val 6818"/>
-            </a:avLst>
-          </a:prstGeom>
-          <a:solidFill>
-            <a:srgbClr val="F8FAFC"/>
-          </a:solidFill>
-          <a:ln w="12700">
-            <a:solidFill>
-              <a:srgbClr val="E2E8F0"/>
-            </a:solidFill>
             <a:prstDash val="dash"/>
           </a:ln>
         </p:spPr>
       </p:sp>
       <p:sp>
         <p:nvSpPr>
-          <p:cNvPr id="30" name="Text 28"/>
+          <p:cNvPr id="29" name="Text 27"/>
           <p:cNvSpPr/>
           <p:nvPr/>
         </p:nvSpPr>
@@ -24675,7 +24698,7 @@
                 <a:ea typeface="Trebuchet MS" pitchFamily="34" charset="-122"/>
                 <a:cs typeface="Trebuchet MS" pitchFamily="34" charset="-120"/>
               </a:rPr>
-              <a:t>tireless</a:t>
+              <a:t>powerless</a:t>
             </a:r>
             <a:endParaRPr lang="en-US" sz="2800" dirty="0"/>
           </a:p>
@@ -24814,7 +24837,7 @@
                 <a:ea typeface="Trebuchet MS" pitchFamily="34" charset="-122"/>
                 <a:cs typeface="Trebuchet MS" pitchFamily="34" charset="-120"/>
               </a:rPr>
-              <a:t>tire</a:t>
+              <a:t>power</a:t>
             </a:r>
             <a:endParaRPr lang="en-US" sz="1300" dirty="0"/>
           </a:p>
@@ -24853,7 +24876,7 @@
                 <a:ea typeface="Calibri" pitchFamily="34" charset="-122"/>
                 <a:cs typeface="Calibri" pitchFamily="34" charset="-120"/>
               </a:rPr>
-              <a:t>to become weary or exhausted</a:t>
+              <a:t>strength or control</a:t>
             </a:r>
             <a:endParaRPr lang="en-US" sz="850" dirty="0"/>
           </a:p>
@@ -24973,46 +24996,7 @@
       </p:sp>
       <p:sp>
         <p:nvSpPr>
-          <p:cNvPr id="22" name="Text 20"/>
-          <p:cNvSpPr/>
-          <p:nvPr/>
-        </p:nvSpPr>
-        <p:spPr>
-          <a:xfrm>
-            <a:off x="5803392" y="2752344"/>
-            <a:ext cx="1828800" cy="182880"/>
-          </a:xfrm>
-          <a:prstGeom prst="rect">
-            <a:avLst/>
-          </a:prstGeom>
-          <a:noFill/>
-          <a:ln/>
-        </p:spPr>
-        <p:txBody>
-          <a:bodyPr wrap="square" lIns="0" tIns="0" rIns="0" bIns="0" rtlCol="0" anchor="t"/>
-          <a:lstStyle/>
-          <a:p>
-            <a:pPr algn="ctr" indent="0" marL="0">
-              <a:buNone/>
-            </a:pPr>
-            <a:r>
-              <a:rPr lang="en-US" sz="700" i="1" dirty="0">
-                <a:solidFill>
-                  <a:srgbClr val="94A3B8"/>
-                </a:solidFill>
-                <a:latin typeface="Calibri" pitchFamily="34" charset="0"/>
-                <a:ea typeface="Calibri" pitchFamily="34" charset="-122"/>
-                <a:cs typeface="Calibri" pitchFamily="34" charset="-120"/>
-              </a:rPr>
-              <a:t>'e' dropped before suffix</a:t>
-            </a:r>
-            <a:endParaRPr lang="en-US" sz="700" dirty="0"/>
-          </a:p>
-        </p:txBody>
-      </p:sp>
-      <p:sp>
-        <p:nvSpPr>
-          <p:cNvPr id="23" name="Shape 21"/>
+          <p:cNvPr id="22" name="Shape 20"/>
           <p:cNvSpPr/>
           <p:nvPr/>
         </p:nvSpPr>
@@ -25039,7 +25023,7 @@
       </p:sp>
       <p:sp>
         <p:nvSpPr>
-          <p:cNvPr id="24" name="Text 22"/>
+          <p:cNvPr id="23" name="Text 21"/>
           <p:cNvSpPr/>
           <p:nvPr/>
         </p:nvSpPr>
@@ -25078,7 +25062,7 @@
       </p:sp>
       <p:sp>
         <p:nvSpPr>
-          <p:cNvPr id="25" name="Shape 23"/>
+          <p:cNvPr id="24" name="Shape 22"/>
           <p:cNvSpPr/>
           <p:nvPr/>
         </p:nvSpPr>
@@ -25105,13 +25089,13 @@
       </p:sp>
       <p:sp>
         <p:nvSpPr>
-          <p:cNvPr id="26" name="Shape 24"/>
-          <p:cNvSpPr/>
-          <p:nvPr/>
-        </p:nvSpPr>
-        <p:spPr>
-          <a:xfrm>
-            <a:off x="2999232" y="3364992"/>
+          <p:cNvPr id="25" name="Shape 23"/>
+          <p:cNvSpPr/>
+          <p:nvPr/>
+        </p:nvSpPr>
+        <p:spPr>
+          <a:xfrm>
+            <a:off x="2313432" y="3364992"/>
             <a:ext cx="1645920" cy="475488"/>
           </a:xfrm>
           <a:prstGeom prst="rect">
@@ -25132,13 +25116,13 @@
       </p:sp>
       <p:sp>
         <p:nvSpPr>
-          <p:cNvPr id="27" name="Text 25"/>
-          <p:cNvSpPr/>
-          <p:nvPr/>
-        </p:nvSpPr>
-        <p:spPr>
-          <a:xfrm>
-            <a:off x="2999232" y="3364992"/>
+          <p:cNvPr id="26" name="Text 24"/>
+          <p:cNvSpPr/>
+          <p:nvPr/>
+        </p:nvSpPr>
+        <p:spPr>
+          <a:xfrm>
+            <a:off x="2313432" y="3364992"/>
             <a:ext cx="1645920" cy="475488"/>
           </a:xfrm>
           <a:prstGeom prst="rect">
@@ -25163,7 +25147,7 @@
                 <a:ea typeface="Trebuchet MS" pitchFamily="34" charset="-122"/>
                 <a:cs typeface="Trebuchet MS" pitchFamily="34" charset="-120"/>
               </a:rPr>
-              <a:t>tire</a:t>
+              <a:t>pow</a:t>
             </a:r>
             <a:endParaRPr lang="en-US" sz="1400" dirty="0"/>
           </a:p>
@@ -25171,14 +25155,14 @@
       </p:sp>
       <p:sp>
         <p:nvSpPr>
-          <p:cNvPr id="28" name="Text 26"/>
-          <p:cNvSpPr/>
-          <p:nvPr/>
-        </p:nvSpPr>
-        <p:spPr>
-          <a:xfrm>
-            <a:off x="4645152" y="3364992"/>
-            <a:ext cx="1097280" cy="475488"/>
+          <p:cNvPr id="27" name="Text 25"/>
+          <p:cNvSpPr/>
+          <p:nvPr/>
+        </p:nvSpPr>
+        <p:spPr>
+          <a:xfrm>
+            <a:off x="3959352" y="3364992"/>
+            <a:ext cx="411480" cy="475488"/>
           </a:xfrm>
           <a:prstGeom prst="rect">
             <a:avLst/>
@@ -25210,13 +25194,13 @@
       </p:sp>
       <p:sp>
         <p:nvSpPr>
-          <p:cNvPr id="29" name="Shape 27"/>
-          <p:cNvSpPr/>
-          <p:nvPr/>
-        </p:nvSpPr>
-        <p:spPr>
-          <a:xfrm>
-            <a:off x="5742432" y="3364992"/>
+          <p:cNvPr id="28" name="Shape 26"/>
+          <p:cNvSpPr/>
+          <p:nvPr/>
+        </p:nvSpPr>
+        <p:spPr>
+          <a:xfrm>
+            <a:off x="4370832" y="3364992"/>
             <a:ext cx="1645920" cy="475488"/>
           </a:xfrm>
           <a:prstGeom prst="rect">
@@ -25237,13 +25221,13 @@
       </p:sp>
       <p:sp>
         <p:nvSpPr>
-          <p:cNvPr id="30" name="Text 28"/>
-          <p:cNvSpPr/>
-          <p:nvPr/>
-        </p:nvSpPr>
-        <p:spPr>
-          <a:xfrm>
-            <a:off x="5742432" y="3364992"/>
+          <p:cNvPr id="29" name="Text 27"/>
+          <p:cNvSpPr/>
+          <p:nvPr/>
+        </p:nvSpPr>
+        <p:spPr>
+          <a:xfrm>
+            <a:off x="4370832" y="3364992"/>
             <a:ext cx="1645920" cy="475488"/>
           </a:xfrm>
           <a:prstGeom prst="rect">
@@ -25268,6 +25252,111 @@
                 <a:ea typeface="Trebuchet MS" pitchFamily="34" charset="-122"/>
                 <a:cs typeface="Trebuchet MS" pitchFamily="34" charset="-120"/>
               </a:rPr>
+              <a:t>er</a:t>
+            </a:r>
+            <a:endParaRPr lang="en-US" sz="1400" dirty="0"/>
+          </a:p>
+        </p:txBody>
+      </p:sp>
+      <p:sp>
+        <p:nvSpPr>
+          <p:cNvPr id="30" name="Text 28"/>
+          <p:cNvSpPr/>
+          <p:nvPr/>
+        </p:nvSpPr>
+        <p:spPr>
+          <a:xfrm>
+            <a:off x="6016752" y="3364992"/>
+            <a:ext cx="411480" cy="475488"/>
+          </a:xfrm>
+          <a:prstGeom prst="rect">
+            <a:avLst/>
+          </a:prstGeom>
+          <a:noFill/>
+          <a:ln/>
+        </p:spPr>
+        <p:txBody>
+          <a:bodyPr wrap="square" lIns="0" tIns="0" rIns="0" bIns="0" rtlCol="0" anchor="ctr"/>
+          <a:lstStyle/>
+          <a:p>
+            <a:pPr algn="ctr" indent="0" marL="0">
+              <a:buNone/>
+            </a:pPr>
+            <a:r>
+              <a:rPr lang="en-US" sz="1600" b="1" dirty="0">
+                <a:solidFill>
+                  <a:srgbClr val="0D9488"/>
+                </a:solidFill>
+                <a:latin typeface="Trebuchet MS" pitchFamily="34" charset="0"/>
+                <a:ea typeface="Trebuchet MS" pitchFamily="34" charset="-122"/>
+                <a:cs typeface="Trebuchet MS" pitchFamily="34" charset="-120"/>
+              </a:rPr>
+              <a:t>·</a:t>
+            </a:r>
+            <a:endParaRPr lang="en-US" sz="1600" dirty="0"/>
+          </a:p>
+        </p:txBody>
+      </p:sp>
+      <p:sp>
+        <p:nvSpPr>
+          <p:cNvPr id="31" name="Shape 29"/>
+          <p:cNvSpPr/>
+          <p:nvPr/>
+        </p:nvSpPr>
+        <p:spPr>
+          <a:xfrm>
+            <a:off x="6428232" y="3364992"/>
+            <a:ext cx="1645920" cy="475488"/>
+          </a:xfrm>
+          <a:prstGeom prst="rect">
+            <a:avLst>
+              <a:gd name="adj" fmla="val 9615"/>
+            </a:avLst>
+          </a:prstGeom>
+          <a:solidFill>
+            <a:srgbClr val="FFFFFF"/>
+          </a:solidFill>
+          <a:ln w="12700">
+            <a:solidFill>
+              <a:srgbClr val="0D9488"/>
+            </a:solidFill>
+            <a:prstDash val="solid"/>
+          </a:ln>
+        </p:spPr>
+      </p:sp>
+      <p:sp>
+        <p:nvSpPr>
+          <p:cNvPr id="32" name="Text 30"/>
+          <p:cNvSpPr/>
+          <p:nvPr/>
+        </p:nvSpPr>
+        <p:spPr>
+          <a:xfrm>
+            <a:off x="6428232" y="3364992"/>
+            <a:ext cx="1645920" cy="475488"/>
+          </a:xfrm>
+          <a:prstGeom prst="rect">
+            <a:avLst/>
+          </a:prstGeom>
+          <a:noFill/>
+          <a:ln/>
+        </p:spPr>
+        <p:txBody>
+          <a:bodyPr wrap="square" lIns="0" tIns="0" rIns="0" bIns="0" rtlCol="0" anchor="ctr"/>
+          <a:lstStyle/>
+          <a:p>
+            <a:pPr algn="ctr" indent="0" marL="0">
+              <a:buNone/>
+            </a:pPr>
+            <a:r>
+              <a:rPr lang="en-US" sz="1400" b="1" dirty="0">
+                <a:solidFill>
+                  <a:srgbClr val="0D9488"/>
+                </a:solidFill>
+                <a:latin typeface="Trebuchet MS" pitchFamily="34" charset="0"/>
+                <a:ea typeface="Trebuchet MS" pitchFamily="34" charset="-122"/>
+                <a:cs typeface="Trebuchet MS" pitchFamily="34" charset="-120"/>
+              </a:rPr>
               <a:t>less</a:t>
             </a:r>
             <a:endParaRPr lang="en-US" sz="1400" dirty="0"/>
@@ -25276,7 +25365,7 @@
       </p:sp>
       <p:sp>
         <p:nvSpPr>
-          <p:cNvPr id="31" name="Shape 29"/>
+          <p:cNvPr id="33" name="Shape 31"/>
           <p:cNvSpPr/>
           <p:nvPr/>
         </p:nvSpPr>
@@ -25303,7 +25392,7 @@
       </p:sp>
       <p:sp>
         <p:nvSpPr>
-          <p:cNvPr id="32" name="Text 30"/>
+          <p:cNvPr id="34" name="Text 32"/>
           <p:cNvSpPr/>
           <p:nvPr/>
         </p:nvSpPr>
@@ -25342,7 +25431,7 @@
       </p:sp>
       <p:sp>
         <p:nvSpPr>
-          <p:cNvPr id="33" name="Shape 31"/>
+          <p:cNvPr id="35" name="Shape 33"/>
           <p:cNvSpPr/>
           <p:nvPr/>
         </p:nvSpPr>
@@ -25369,7 +25458,7 @@
       </p:sp>
       <p:sp>
         <p:nvSpPr>
-          <p:cNvPr id="34" name="Text 32"/>
+          <p:cNvPr id="36" name="Text 34"/>
           <p:cNvSpPr/>
           <p:nvPr/>
         </p:nvSpPr>
@@ -25831,7 +25920,7 @@
                 <a:ea typeface="Trebuchet MS" pitchFamily="34" charset="-122"/>
                 <a:cs typeface="Trebuchet MS" pitchFamily="34" charset="-120"/>
               </a:rPr>
-              <a:t>tireless</a:t>
+              <a:t>powerless</a:t>
             </a:r>
             <a:endParaRPr lang="en-US" sz="2800" dirty="0"/>
           </a:p>
@@ -25970,7 +26059,7 @@
                 <a:ea typeface="Trebuchet MS" pitchFamily="34" charset="-122"/>
                 <a:cs typeface="Trebuchet MS" pitchFamily="34" charset="-120"/>
               </a:rPr>
-              <a:t>tire</a:t>
+              <a:t>power</a:t>
             </a:r>
             <a:endParaRPr lang="en-US" sz="1300" dirty="0"/>
           </a:p>
@@ -26009,7 +26098,7 @@
                 <a:ea typeface="Calibri" pitchFamily="34" charset="-122"/>
                 <a:cs typeface="Calibri" pitchFamily="34" charset="-120"/>
               </a:rPr>
-              <a:t>to become weary or exhausted</a:t>
+              <a:t>strength or control</a:t>
             </a:r>
             <a:endParaRPr lang="en-US" sz="850" dirty="0"/>
           </a:p>
@@ -26129,46 +26218,7 @@
       </p:sp>
       <p:sp>
         <p:nvSpPr>
-          <p:cNvPr id="22" name="Text 20"/>
-          <p:cNvSpPr/>
-          <p:nvPr/>
-        </p:nvSpPr>
-        <p:spPr>
-          <a:xfrm>
-            <a:off x="5803392" y="2752344"/>
-            <a:ext cx="1828800" cy="182880"/>
-          </a:xfrm>
-          <a:prstGeom prst="rect">
-            <a:avLst/>
-          </a:prstGeom>
-          <a:noFill/>
-          <a:ln/>
-        </p:spPr>
-        <p:txBody>
-          <a:bodyPr wrap="square" lIns="0" tIns="0" rIns="0" bIns="0" rtlCol="0" anchor="t"/>
-          <a:lstStyle/>
-          <a:p>
-            <a:pPr algn="ctr" indent="0" marL="0">
-              <a:buNone/>
-            </a:pPr>
-            <a:r>
-              <a:rPr lang="en-US" sz="700" i="1" dirty="0">
-                <a:solidFill>
-                  <a:srgbClr val="94A3B8"/>
-                </a:solidFill>
-                <a:latin typeface="Calibri" pitchFamily="34" charset="0"/>
-                <a:ea typeface="Calibri" pitchFamily="34" charset="-122"/>
-                <a:cs typeface="Calibri" pitchFamily="34" charset="-120"/>
-              </a:rPr>
-              <a:t>'e' dropped before suffix</a:t>
-            </a:r>
-            <a:endParaRPr lang="en-US" sz="700" dirty="0"/>
-          </a:p>
-        </p:txBody>
-      </p:sp>
-      <p:sp>
-        <p:nvSpPr>
-          <p:cNvPr id="23" name="Shape 21"/>
+          <p:cNvPr id="22" name="Shape 20"/>
           <p:cNvSpPr/>
           <p:nvPr/>
         </p:nvSpPr>
@@ -26195,7 +26245,7 @@
       </p:sp>
       <p:sp>
         <p:nvSpPr>
-          <p:cNvPr id="24" name="Text 22"/>
+          <p:cNvPr id="23" name="Text 21"/>
           <p:cNvSpPr/>
           <p:nvPr/>
         </p:nvSpPr>
@@ -26234,7 +26284,7 @@
       </p:sp>
       <p:sp>
         <p:nvSpPr>
-          <p:cNvPr id="25" name="Shape 23"/>
+          <p:cNvPr id="24" name="Shape 22"/>
           <p:cNvSpPr/>
           <p:nvPr/>
         </p:nvSpPr>
@@ -26261,13 +26311,13 @@
       </p:sp>
       <p:sp>
         <p:nvSpPr>
-          <p:cNvPr id="26" name="Shape 24"/>
-          <p:cNvSpPr/>
-          <p:nvPr/>
-        </p:nvSpPr>
-        <p:spPr>
-          <a:xfrm>
-            <a:off x="2999232" y="3364992"/>
+          <p:cNvPr id="25" name="Shape 23"/>
+          <p:cNvSpPr/>
+          <p:nvPr/>
+        </p:nvSpPr>
+        <p:spPr>
+          <a:xfrm>
+            <a:off x="2313432" y="3364992"/>
             <a:ext cx="1645920" cy="475488"/>
           </a:xfrm>
           <a:prstGeom prst="rect">
@@ -26288,13 +26338,13 @@
       </p:sp>
       <p:sp>
         <p:nvSpPr>
-          <p:cNvPr id="27" name="Text 25"/>
-          <p:cNvSpPr/>
-          <p:nvPr/>
-        </p:nvSpPr>
-        <p:spPr>
-          <a:xfrm>
-            <a:off x="2999232" y="3364992"/>
+          <p:cNvPr id="26" name="Text 24"/>
+          <p:cNvSpPr/>
+          <p:nvPr/>
+        </p:nvSpPr>
+        <p:spPr>
+          <a:xfrm>
+            <a:off x="2313432" y="3364992"/>
             <a:ext cx="1645920" cy="475488"/>
           </a:xfrm>
           <a:prstGeom prst="rect">
@@ -26319,7 +26369,7 @@
                 <a:ea typeface="Trebuchet MS" pitchFamily="34" charset="-122"/>
                 <a:cs typeface="Trebuchet MS" pitchFamily="34" charset="-120"/>
               </a:rPr>
-              <a:t>tire</a:t>
+              <a:t>pow</a:t>
             </a:r>
             <a:endParaRPr lang="en-US" sz="1400" dirty="0"/>
           </a:p>
@@ -26327,14 +26377,14 @@
       </p:sp>
       <p:sp>
         <p:nvSpPr>
-          <p:cNvPr id="28" name="Text 26"/>
-          <p:cNvSpPr/>
-          <p:nvPr/>
-        </p:nvSpPr>
-        <p:spPr>
-          <a:xfrm>
-            <a:off x="4645152" y="3364992"/>
-            <a:ext cx="1097280" cy="475488"/>
+          <p:cNvPr id="27" name="Text 25"/>
+          <p:cNvSpPr/>
+          <p:nvPr/>
+        </p:nvSpPr>
+        <p:spPr>
+          <a:xfrm>
+            <a:off x="3959352" y="3364992"/>
+            <a:ext cx="411480" cy="475488"/>
           </a:xfrm>
           <a:prstGeom prst="rect">
             <a:avLst/>
@@ -26366,13 +26416,13 @@
       </p:sp>
       <p:sp>
         <p:nvSpPr>
-          <p:cNvPr id="29" name="Shape 27"/>
-          <p:cNvSpPr/>
-          <p:nvPr/>
-        </p:nvSpPr>
-        <p:spPr>
-          <a:xfrm>
-            <a:off x="5742432" y="3364992"/>
+          <p:cNvPr id="28" name="Shape 26"/>
+          <p:cNvSpPr/>
+          <p:nvPr/>
+        </p:nvSpPr>
+        <p:spPr>
+          <a:xfrm>
+            <a:off x="4370832" y="3364992"/>
             <a:ext cx="1645920" cy="475488"/>
           </a:xfrm>
           <a:prstGeom prst="rect">
@@ -26393,13 +26443,13 @@
       </p:sp>
       <p:sp>
         <p:nvSpPr>
-          <p:cNvPr id="30" name="Text 28"/>
-          <p:cNvSpPr/>
-          <p:nvPr/>
-        </p:nvSpPr>
-        <p:spPr>
-          <a:xfrm>
-            <a:off x="5742432" y="3364992"/>
+          <p:cNvPr id="29" name="Text 27"/>
+          <p:cNvSpPr/>
+          <p:nvPr/>
+        </p:nvSpPr>
+        <p:spPr>
+          <a:xfrm>
+            <a:off x="4370832" y="3364992"/>
             <a:ext cx="1645920" cy="475488"/>
           </a:xfrm>
           <a:prstGeom prst="rect">
@@ -26424,6 +26474,111 @@
                 <a:ea typeface="Trebuchet MS" pitchFamily="34" charset="-122"/>
                 <a:cs typeface="Trebuchet MS" pitchFamily="34" charset="-120"/>
               </a:rPr>
+              <a:t>er</a:t>
+            </a:r>
+            <a:endParaRPr lang="en-US" sz="1400" dirty="0"/>
+          </a:p>
+        </p:txBody>
+      </p:sp>
+      <p:sp>
+        <p:nvSpPr>
+          <p:cNvPr id="30" name="Text 28"/>
+          <p:cNvSpPr/>
+          <p:nvPr/>
+        </p:nvSpPr>
+        <p:spPr>
+          <a:xfrm>
+            <a:off x="6016752" y="3364992"/>
+            <a:ext cx="411480" cy="475488"/>
+          </a:xfrm>
+          <a:prstGeom prst="rect">
+            <a:avLst/>
+          </a:prstGeom>
+          <a:noFill/>
+          <a:ln/>
+        </p:spPr>
+        <p:txBody>
+          <a:bodyPr wrap="square" lIns="0" tIns="0" rIns="0" bIns="0" rtlCol="0" anchor="ctr"/>
+          <a:lstStyle/>
+          <a:p>
+            <a:pPr algn="ctr" indent="0" marL="0">
+              <a:buNone/>
+            </a:pPr>
+            <a:r>
+              <a:rPr lang="en-US" sz="1600" b="1" dirty="0">
+                <a:solidFill>
+                  <a:srgbClr val="0D9488"/>
+                </a:solidFill>
+                <a:latin typeface="Trebuchet MS" pitchFamily="34" charset="0"/>
+                <a:ea typeface="Trebuchet MS" pitchFamily="34" charset="-122"/>
+                <a:cs typeface="Trebuchet MS" pitchFamily="34" charset="-120"/>
+              </a:rPr>
+              <a:t>·</a:t>
+            </a:r>
+            <a:endParaRPr lang="en-US" sz="1600" dirty="0"/>
+          </a:p>
+        </p:txBody>
+      </p:sp>
+      <p:sp>
+        <p:nvSpPr>
+          <p:cNvPr id="31" name="Shape 29"/>
+          <p:cNvSpPr/>
+          <p:nvPr/>
+        </p:nvSpPr>
+        <p:spPr>
+          <a:xfrm>
+            <a:off x="6428232" y="3364992"/>
+            <a:ext cx="1645920" cy="475488"/>
+          </a:xfrm>
+          <a:prstGeom prst="rect">
+            <a:avLst>
+              <a:gd name="adj" fmla="val 9615"/>
+            </a:avLst>
+          </a:prstGeom>
+          <a:solidFill>
+            <a:srgbClr val="FFFFFF"/>
+          </a:solidFill>
+          <a:ln w="12700">
+            <a:solidFill>
+              <a:srgbClr val="0D9488"/>
+            </a:solidFill>
+            <a:prstDash val="solid"/>
+          </a:ln>
+        </p:spPr>
+      </p:sp>
+      <p:sp>
+        <p:nvSpPr>
+          <p:cNvPr id="32" name="Text 30"/>
+          <p:cNvSpPr/>
+          <p:nvPr/>
+        </p:nvSpPr>
+        <p:spPr>
+          <a:xfrm>
+            <a:off x="6428232" y="3364992"/>
+            <a:ext cx="1645920" cy="475488"/>
+          </a:xfrm>
+          <a:prstGeom prst="rect">
+            <a:avLst/>
+          </a:prstGeom>
+          <a:noFill/>
+          <a:ln/>
+        </p:spPr>
+        <p:txBody>
+          <a:bodyPr wrap="square" lIns="0" tIns="0" rIns="0" bIns="0" rtlCol="0" anchor="ctr"/>
+          <a:lstStyle/>
+          <a:p>
+            <a:pPr algn="ctr" indent="0" marL="0">
+              <a:buNone/>
+            </a:pPr>
+            <a:r>
+              <a:rPr lang="en-US" sz="1400" b="1" dirty="0">
+                <a:solidFill>
+                  <a:srgbClr val="0D9488"/>
+                </a:solidFill>
+                <a:latin typeface="Trebuchet MS" pitchFamily="34" charset="0"/>
+                <a:ea typeface="Trebuchet MS" pitchFamily="34" charset="-122"/>
+                <a:cs typeface="Trebuchet MS" pitchFamily="34" charset="-120"/>
+              </a:rPr>
               <a:t>less</a:t>
             </a:r>
             <a:endParaRPr lang="en-US" sz="1400" dirty="0"/>
@@ -26432,7 +26587,7 @@
       </p:sp>
       <p:sp>
         <p:nvSpPr>
-          <p:cNvPr id="31" name="Shape 29"/>
+          <p:cNvPr id="33" name="Shape 31"/>
           <p:cNvSpPr/>
           <p:nvPr/>
         </p:nvSpPr>
@@ -26459,7 +26614,7 @@
       </p:sp>
       <p:sp>
         <p:nvSpPr>
-          <p:cNvPr id="32" name="Text 30"/>
+          <p:cNvPr id="34" name="Text 32"/>
           <p:cNvSpPr/>
           <p:nvPr/>
         </p:nvSpPr>
@@ -26498,7 +26653,7 @@
       </p:sp>
       <p:sp>
         <p:nvSpPr>
-          <p:cNvPr id="33" name="Shape 31"/>
+          <p:cNvPr id="35" name="Shape 33"/>
           <p:cNvSpPr/>
           <p:nvPr/>
         </p:nvSpPr>
@@ -26525,7 +26680,7 @@
       </p:sp>
       <p:sp>
         <p:nvSpPr>
-          <p:cNvPr id="34" name="Shape 32"/>
+          <p:cNvPr id="36" name="Shape 34"/>
           <p:cNvSpPr/>
           <p:nvPr/>
         </p:nvSpPr>
@@ -26552,7 +26707,7 @@
       </p:sp>
       <p:sp>
         <p:nvSpPr>
-          <p:cNvPr id="35" name="Text 33"/>
+          <p:cNvPr id="37" name="Text 35"/>
           <p:cNvSpPr/>
           <p:nvPr/>
         </p:nvSpPr>
@@ -26583,7 +26738,7 @@
                 <a:ea typeface="Trebuchet MS" pitchFamily="34" charset="-122"/>
                 <a:cs typeface="Trebuchet MS" pitchFamily="34" charset="-120"/>
               </a:rPr>
-              <a:t>t</a:t>
+              <a:t>p</a:t>
             </a:r>
             <a:endParaRPr lang="en-US" sz="900" dirty="0"/>
           </a:p>
@@ -26591,7 +26746,7 @@
       </p:sp>
       <p:sp>
         <p:nvSpPr>
-          <p:cNvPr id="36" name="Shape 34"/>
+          <p:cNvPr id="38" name="Shape 36"/>
           <p:cNvSpPr/>
           <p:nvPr/>
         </p:nvSpPr>
@@ -26618,7 +26773,7 @@
       </p:sp>
       <p:sp>
         <p:nvSpPr>
-          <p:cNvPr id="37" name="Text 35"/>
+          <p:cNvPr id="39" name="Text 37"/>
           <p:cNvSpPr/>
           <p:nvPr/>
         </p:nvSpPr>
@@ -26649,7 +26804,7 @@
                 <a:ea typeface="Trebuchet MS" pitchFamily="34" charset="-122"/>
                 <a:cs typeface="Trebuchet MS" pitchFamily="34" charset="-120"/>
               </a:rPr>
-              <a:t>ir</a:t>
+              <a:t>ow</a:t>
             </a:r>
             <a:endParaRPr lang="en-US" sz="900" dirty="0"/>
           </a:p>
@@ -26657,7 +26812,7 @@
       </p:sp>
       <p:sp>
         <p:nvSpPr>
-          <p:cNvPr id="38" name="Shape 36"/>
+          <p:cNvPr id="40" name="Shape 38"/>
           <p:cNvSpPr/>
           <p:nvPr/>
         </p:nvSpPr>
@@ -26684,7 +26839,7 @@
       </p:sp>
       <p:sp>
         <p:nvSpPr>
-          <p:cNvPr id="39" name="Text 37"/>
+          <p:cNvPr id="41" name="Text 39"/>
           <p:cNvSpPr/>
           <p:nvPr/>
         </p:nvSpPr>
@@ -26715,7 +26870,7 @@
                 <a:ea typeface="Trebuchet MS" pitchFamily="34" charset="-122"/>
                 <a:cs typeface="Trebuchet MS" pitchFamily="34" charset="-120"/>
               </a:rPr>
-              <a:t>e</a:t>
+              <a:t>er</a:t>
             </a:r>
             <a:endParaRPr lang="en-US" sz="900" dirty="0"/>
           </a:p>
@@ -26723,7 +26878,7 @@
       </p:sp>
       <p:sp>
         <p:nvSpPr>
-          <p:cNvPr id="40" name="Shape 38"/>
+          <p:cNvPr id="42" name="Shape 40"/>
           <p:cNvSpPr/>
           <p:nvPr/>
         </p:nvSpPr>
@@ -26750,7 +26905,7 @@
       </p:sp>
       <p:sp>
         <p:nvSpPr>
-          <p:cNvPr id="41" name="Text 39"/>
+          <p:cNvPr id="43" name="Text 41"/>
           <p:cNvSpPr/>
           <p:nvPr/>
         </p:nvSpPr>
@@ -26789,7 +26944,7 @@
       </p:sp>
       <p:sp>
         <p:nvSpPr>
-          <p:cNvPr id="42" name="Shape 40"/>
+          <p:cNvPr id="44" name="Shape 42"/>
           <p:cNvSpPr/>
           <p:nvPr/>
         </p:nvSpPr>
@@ -26816,7 +26971,7 @@
       </p:sp>
       <p:sp>
         <p:nvSpPr>
-          <p:cNvPr id="43" name="Text 41"/>
+          <p:cNvPr id="45" name="Text 43"/>
           <p:cNvSpPr/>
           <p:nvPr/>
         </p:nvSpPr>
@@ -26855,7 +27010,7 @@
       </p:sp>
       <p:sp>
         <p:nvSpPr>
-          <p:cNvPr id="44" name="Shape 42"/>
+          <p:cNvPr id="46" name="Shape 44"/>
           <p:cNvSpPr/>
           <p:nvPr/>
         </p:nvSpPr>
@@ -26882,7 +27037,7 @@
       </p:sp>
       <p:sp>
         <p:nvSpPr>
-          <p:cNvPr id="45" name="Text 43"/>
+          <p:cNvPr id="47" name="Text 45"/>
           <p:cNvSpPr/>
           <p:nvPr/>
         </p:nvSpPr>
@@ -27344,7 +27499,7 @@
                 <a:ea typeface="Trebuchet MS" pitchFamily="34" charset="-122"/>
                 <a:cs typeface="Trebuchet MS" pitchFamily="34" charset="-120"/>
               </a:rPr>
-              <a:t>helpless</a:t>
+              <a:t>speechless</a:t>
             </a:r>
             <a:endParaRPr lang="en-US" sz="2800" dirty="0"/>
           </a:p>
@@ -28171,7 +28326,7 @@
                 <a:ea typeface="Trebuchet MS" pitchFamily="34" charset="-122"/>
                 <a:cs typeface="Trebuchet MS" pitchFamily="34" charset="-120"/>
               </a:rPr>
-              <a:t>helpless</a:t>
+              <a:t>speechless</a:t>
             </a:r>
             <a:endParaRPr lang="en-US" sz="2800" dirty="0"/>
           </a:p>
@@ -28310,7 +28465,7 @@
                 <a:ea typeface="Trebuchet MS" pitchFamily="34" charset="-122"/>
                 <a:cs typeface="Trebuchet MS" pitchFamily="34" charset="-120"/>
               </a:rPr>
-              <a:t>help</a:t>
+              <a:t>speech</a:t>
             </a:r>
             <a:endParaRPr lang="en-US" sz="1300" dirty="0"/>
           </a:p>
@@ -28349,7 +28504,7 @@
                 <a:ea typeface="Calibri" pitchFamily="34" charset="-122"/>
                 <a:cs typeface="Calibri" pitchFamily="34" charset="-120"/>
               </a:rPr>
-              <a:t>to assist or support</a:t>
+              <a:t>spoken words</a:t>
             </a:r>
             <a:endParaRPr lang="en-US" sz="850" dirty="0"/>
           </a:p>
@@ -29156,7 +29311,7 @@
                 <a:ea typeface="Trebuchet MS" pitchFamily="34" charset="-122"/>
                 <a:cs typeface="Trebuchet MS" pitchFamily="34" charset="-120"/>
               </a:rPr>
-              <a:t>helpless</a:t>
+              <a:t>speechless</a:t>
             </a:r>
             <a:endParaRPr lang="en-US" sz="2800" dirty="0"/>
           </a:p>
@@ -29295,7 +29450,7 @@
                 <a:ea typeface="Trebuchet MS" pitchFamily="34" charset="-122"/>
                 <a:cs typeface="Trebuchet MS" pitchFamily="34" charset="-120"/>
               </a:rPr>
-              <a:t>help</a:t>
+              <a:t>speech</a:t>
             </a:r>
             <a:endParaRPr lang="en-US" sz="1300" dirty="0"/>
           </a:p>
@@ -29334,7 +29489,7 @@
                 <a:ea typeface="Calibri" pitchFamily="34" charset="-122"/>
                 <a:cs typeface="Calibri" pitchFamily="34" charset="-120"/>
               </a:rPr>
-              <a:t>to assist or support</a:t>
+              <a:t>spoken words</a:t>
             </a:r>
             <a:endParaRPr lang="en-US" sz="850" dirty="0"/>
           </a:p>
@@ -29605,7 +29760,7 @@
                 <a:ea typeface="Trebuchet MS" pitchFamily="34" charset="-122"/>
                 <a:cs typeface="Trebuchet MS" pitchFamily="34" charset="-120"/>
               </a:rPr>
-              <a:t>help</a:t>
+              <a:t>speech</a:t>
             </a:r>
             <a:endParaRPr lang="en-US" sz="1400" dirty="0"/>
           </a:p>
@@ -30273,7 +30428,7 @@
                 <a:ea typeface="Trebuchet MS" pitchFamily="34" charset="-122"/>
                 <a:cs typeface="Trebuchet MS" pitchFamily="34" charset="-120"/>
               </a:rPr>
-              <a:t>helpless</a:t>
+              <a:t>speechless</a:t>
             </a:r>
             <a:endParaRPr lang="en-US" sz="2800" dirty="0"/>
           </a:p>
@@ -30412,7 +30567,7 @@
                 <a:ea typeface="Trebuchet MS" pitchFamily="34" charset="-122"/>
                 <a:cs typeface="Trebuchet MS" pitchFamily="34" charset="-120"/>
               </a:rPr>
-              <a:t>help</a:t>
+              <a:t>speech</a:t>
             </a:r>
             <a:endParaRPr lang="en-US" sz="1300" dirty="0"/>
           </a:p>
@@ -30451,7 +30606,7 @@
                 <a:ea typeface="Calibri" pitchFamily="34" charset="-122"/>
                 <a:cs typeface="Calibri" pitchFamily="34" charset="-120"/>
               </a:rPr>
-              <a:t>to assist or support</a:t>
+              <a:t>spoken words</a:t>
             </a:r>
             <a:endParaRPr lang="en-US" sz="850" dirty="0"/>
           </a:p>
@@ -30722,7 +30877,7 @@
                 <a:ea typeface="Trebuchet MS" pitchFamily="34" charset="-122"/>
                 <a:cs typeface="Trebuchet MS" pitchFamily="34" charset="-120"/>
               </a:rPr>
-              <a:t>help</a:t>
+              <a:t>speech</a:t>
             </a:r>
             <a:endParaRPr lang="en-US" sz="1400" dirty="0"/>
           </a:p>
@@ -30986,7 +31141,7 @@
                 <a:ea typeface="Trebuchet MS" pitchFamily="34" charset="-122"/>
                 <a:cs typeface="Trebuchet MS" pitchFamily="34" charset="-120"/>
               </a:rPr>
-              <a:t>h</a:t>
+              <a:t>s</a:t>
             </a:r>
             <a:endParaRPr lang="en-US" sz="900" dirty="0"/>
           </a:p>
@@ -31052,7 +31207,7 @@
                 <a:ea typeface="Trebuchet MS" pitchFamily="34" charset="-122"/>
                 <a:cs typeface="Trebuchet MS" pitchFamily="34" charset="-120"/>
               </a:rPr>
-              <a:t>e</a:t>
+              <a:t>p</a:t>
             </a:r>
             <a:endParaRPr lang="en-US" sz="900" dirty="0"/>
           </a:p>
@@ -31118,7 +31273,7 @@
                 <a:ea typeface="Trebuchet MS" pitchFamily="34" charset="-122"/>
                 <a:cs typeface="Trebuchet MS" pitchFamily="34" charset="-120"/>
               </a:rPr>
-              <a:t>l</a:t>
+              <a:t>ee</a:t>
             </a:r>
             <a:endParaRPr lang="en-US" sz="900" dirty="0"/>
           </a:p>
@@ -31184,7 +31339,7 @@
                 <a:ea typeface="Trebuchet MS" pitchFamily="34" charset="-122"/>
                 <a:cs typeface="Trebuchet MS" pitchFamily="34" charset="-120"/>
               </a:rPr>
-              <a:t>p</a:t>
+              <a:t>ch</a:t>
             </a:r>
             <a:endParaRPr lang="en-US" sz="900" dirty="0"/>
           </a:p>
@@ -33208,7 +33363,7 @@
                 <a:ea typeface="Trebuchet MS" pitchFamily="34" charset="-122"/>
                 <a:cs typeface="Trebuchet MS" pitchFamily="34" charset="-120"/>
               </a:rPr>
-              <a:t>help</a:t>
+              <a:t>hope</a:t>
             </a:r>
             <a:endParaRPr lang="en-US" sz="1300" dirty="0"/>
           </a:p>
@@ -33400,7 +33555,7 @@
                 <a:ea typeface="Trebuchet MS" pitchFamily="34" charset="-122"/>
                 <a:cs typeface="Trebuchet MS" pitchFamily="34" charset="-120"/>
               </a:rPr>
-              <a:t>power</a:t>
+              <a:t>care</a:t>
             </a:r>
             <a:endParaRPr lang="en-US" sz="1300" dirty="0"/>
           </a:p>
@@ -33489,7 +33644,7 @@
                 <a:ea typeface="Trebuchet MS" pitchFamily="34" charset="-122"/>
                 <a:cs typeface="Trebuchet MS" pitchFamily="34" charset="-120"/>
               </a:rPr>
-              <a:t>over-</a:t>
+              <a:t>mis-</a:t>
             </a:r>
             <a:endParaRPr lang="en-US" sz="1300" dirty="0"/>
           </a:p>
@@ -33553,7 +33708,7 @@
                 <a:ea typeface="Trebuchet MS" pitchFamily="34" charset="-122"/>
                 <a:cs typeface="Trebuchet MS" pitchFamily="34" charset="-120"/>
               </a:rPr>
-              <a:t>home</a:t>
+              <a:t>help</a:t>
             </a:r>
             <a:endParaRPr lang="en-US" sz="1300" dirty="0"/>
           </a:p>
@@ -33642,7 +33797,7 @@
                 <a:ea typeface="Trebuchet MS" pitchFamily="34" charset="-122"/>
                 <a:cs typeface="Trebuchet MS" pitchFamily="34" charset="-120"/>
               </a:rPr>
-              <a:t>care-</a:t>
+              <a:t>over-</a:t>
             </a:r>
             <a:endParaRPr lang="en-US" sz="1300" dirty="0"/>
           </a:p>
@@ -33706,7 +33861,7 @@
                 <a:ea typeface="Trebuchet MS" pitchFamily="34" charset="-122"/>
                 <a:cs typeface="Trebuchet MS" pitchFamily="34" charset="-120"/>
               </a:rPr>
-              <a:t>fear</a:t>
+              <a:t>power</a:t>
             </a:r>
             <a:endParaRPr lang="en-US" sz="1300" dirty="0"/>
           </a:p>
@@ -33795,7 +33950,7 @@
                 <a:ea typeface="Trebuchet MS" pitchFamily="34" charset="-122"/>
                 <a:cs typeface="Trebuchet MS" pitchFamily="34" charset="-120"/>
               </a:rPr>
-              <a:t>hope-</a:t>
+              <a:t>self-</a:t>
             </a:r>
             <a:endParaRPr lang="en-US" sz="1300" dirty="0"/>
           </a:p>
@@ -33859,7 +34014,7 @@
                 <a:ea typeface="Trebuchet MS" pitchFamily="34" charset="-122"/>
                 <a:cs typeface="Trebuchet MS" pitchFamily="34" charset="-120"/>
               </a:rPr>
-              <a:t>thought</a:t>
+              <a:t>harm</a:t>
             </a:r>
             <a:endParaRPr lang="en-US" sz="1300" dirty="0"/>
           </a:p>
@@ -33989,7 +34144,7 @@
                 <a:ea typeface="Trebuchet MS" pitchFamily="34" charset="-122"/>
                 <a:cs typeface="Trebuchet MS" pitchFamily="34" charset="-120"/>
               </a:rPr>
-              <a:t>helpless</a:t>
+              <a:t>hopeless</a:t>
             </a:r>
             <a:endParaRPr lang="en-US" sz="1200" dirty="0"/>
           </a:p>
@@ -34055,7 +34210,7 @@
                 <a:ea typeface="Trebuchet MS" pitchFamily="34" charset="-122"/>
                 <a:cs typeface="Trebuchet MS" pitchFamily="34" charset="-120"/>
               </a:rPr>
-              <a:t>fearless</a:t>
+              <a:t>careless</a:t>
             </a:r>
             <a:endParaRPr lang="en-US" sz="1200" dirty="0"/>
           </a:p>
@@ -34121,7 +34276,7 @@
                 <a:ea typeface="Trebuchet MS" pitchFamily="34" charset="-122"/>
                 <a:cs typeface="Trebuchet MS" pitchFamily="34" charset="-120"/>
               </a:rPr>
-              <a:t>homeless</a:t>
+              <a:t>helpless</a:t>
             </a:r>
             <a:endParaRPr lang="en-US" sz="1200" dirty="0"/>
           </a:p>
@@ -34187,7 +34342,7 @@
                 <a:ea typeface="Trebuchet MS" pitchFamily="34" charset="-122"/>
                 <a:cs typeface="Trebuchet MS" pitchFamily="34" charset="-120"/>
               </a:rPr>
-              <a:t>careless</a:t>
+              <a:t>harmless</a:t>
             </a:r>
             <a:endParaRPr lang="en-US" sz="1200" dirty="0"/>
           </a:p>
@@ -34253,7 +34408,7 @@
                 <a:ea typeface="Trebuchet MS" pitchFamily="34" charset="-122"/>
                 <a:cs typeface="Trebuchet MS" pitchFamily="34" charset="-120"/>
               </a:rPr>
-              <a:t>hopeless</a:t>
+              <a:t>fearless</a:t>
             </a:r>
             <a:endParaRPr lang="en-US" sz="1200" dirty="0"/>
           </a:p>
@@ -34319,7 +34474,7 @@
                 <a:ea typeface="Trebuchet MS" pitchFamily="34" charset="-122"/>
                 <a:cs typeface="Trebuchet MS" pitchFamily="34" charset="-120"/>
               </a:rPr>
-              <a:t>powerless</a:t>
+              <a:t>wireless</a:t>
             </a:r>
             <a:endParaRPr lang="en-US" sz="1200" dirty="0"/>
           </a:p>
@@ -34385,7 +34540,7 @@
                 <a:ea typeface="Trebuchet MS" pitchFamily="34" charset="-122"/>
                 <a:cs typeface="Trebuchet MS" pitchFamily="34" charset="-120"/>
               </a:rPr>
-              <a:t>thoughtless</a:t>
+              <a:t>endless</a:t>
             </a:r>
             <a:endParaRPr lang="en-US" sz="1200" dirty="0"/>
           </a:p>
@@ -35071,7 +35226,7 @@
                 <a:ea typeface="Calibri" pitchFamily="34" charset="-122"/>
                 <a:cs typeface="Calibri" pitchFamily="34" charset="-120"/>
               </a:rPr>
-              <a:t>The core part of a word carrying its basic meaning. In 'helpless', the root is the part before the suffix '-less'.</a:t>
+              <a:t>The core part of a word carrying its basic meaning. In 'hopeless', the root is the part before the suffix '-less'.</a:t>
             </a:r>
             <a:endParaRPr lang="en-US" sz="1350" dirty="0"/>
           </a:p>
@@ -35235,7 +35390,7 @@
                 <a:ea typeface="Calibri" pitchFamily="34" charset="-122"/>
                 <a:cs typeface="Calibri" pitchFamily="34" charset="-120"/>
               </a:rPr>
-              <a:t>A meaningful word part added to the beginning of a root to change its meaning. E.g. 'un-' in 'fearless' means 'not'.</a:t>
+              <a:t>A meaningful word part added to the beginning of a root to change its meaning. E.g. 'un-' in 'careless' means 'not'.</a:t>
             </a:r>
             <a:endParaRPr lang="en-US" sz="1350" dirty="0"/>
           </a:p>
@@ -35639,7 +35794,7 @@
                 <a:ea typeface="Calibri" pitchFamily="34" charset="-122"/>
                 <a:cs typeface="Calibri" pitchFamily="34" charset="-120"/>
               </a:rPr>
-              <a:t>1.  The suffix '-less' means 'without' or 'lacking something'.</a:t>
+              <a:t>1.  The word 'careless' means someone who is very careful.</a:t>
             </a:r>
             <a:endParaRPr lang="en-US" sz="1300" dirty="0"/>
           </a:p>
@@ -35662,11 +35817,11 @@
             </a:avLst>
           </a:prstGeom>
           <a:solidFill>
-            <a:srgbClr val="DCFCE7"/>
-          </a:solidFill>
-          <a:ln w="12700">
-            <a:solidFill>
-              <a:srgbClr val="16A34A"/>
+            <a:srgbClr val="FEE2E2"/>
+          </a:solidFill>
+          <a:ln w="12700">
+            <a:solidFill>
+              <a:srgbClr val="DC2626"/>
             </a:solidFill>
             <a:prstDash val="solid"/>
           </a:ln>
@@ -35699,13 +35854,13 @@
             <a:r>
               <a:rPr lang="en-US" sz="1100" b="1" dirty="0">
                 <a:solidFill>
-                  <a:srgbClr val="16A34A"/>
+                  <a:srgbClr val="DC2626"/>
                 </a:solidFill>
                 <a:latin typeface="Trebuchet MS" pitchFamily="34" charset="0"/>
                 <a:ea typeface="Trebuchet MS" pitchFamily="34" charset="-122"/>
                 <a:cs typeface="Trebuchet MS" pitchFamily="34" charset="-120"/>
               </a:rPr>
-              <a:t>TRUE</a:t>
+              <a:t>FALSE</a:t>
             </a:r>
             <a:endParaRPr lang="en-US" sz="1100" dirty="0"/>
           </a:p>
@@ -35778,7 +35933,7 @@
                 <a:ea typeface="Calibri" pitchFamily="34" charset="-122"/>
                 <a:cs typeface="Calibri" pitchFamily="34" charset="-120"/>
               </a:rPr>
-              <a:t>2.  Adding '-less' to a word makes it mean more of something.</a:t>
+              <a:t>2.  The suffix '-less' comes from Old English.</a:t>
             </a:r>
             <a:endParaRPr lang="en-US" sz="1300" dirty="0"/>
           </a:p>
@@ -35801,11 +35956,11 @@
             </a:avLst>
           </a:prstGeom>
           <a:solidFill>
-            <a:srgbClr val="FEE2E2"/>
-          </a:solidFill>
-          <a:ln w="12700">
-            <a:solidFill>
-              <a:srgbClr val="DC2626"/>
+            <a:srgbClr val="DCFCE7"/>
+          </a:solidFill>
+          <a:ln w="12700">
+            <a:solidFill>
+              <a:srgbClr val="16A34A"/>
             </a:solidFill>
             <a:prstDash val="solid"/>
           </a:ln>
@@ -35838,13 +35993,13 @@
             <a:r>
               <a:rPr lang="en-US" sz="1100" b="1" dirty="0">
                 <a:solidFill>
-                  <a:srgbClr val="DC2626"/>
+                  <a:srgbClr val="16A34A"/>
                 </a:solidFill>
                 <a:latin typeface="Trebuchet MS" pitchFamily="34" charset="0"/>
                 <a:ea typeface="Trebuchet MS" pitchFamily="34" charset="-122"/>
                 <a:cs typeface="Trebuchet MS" pitchFamily="34" charset="-120"/>
               </a:rPr>
-              <a:t>FALSE</a:t>
+              <a:t>TRUE</a:t>
             </a:r>
             <a:endParaRPr lang="en-US" sz="1100" dirty="0"/>
           </a:p>
@@ -35917,7 +36072,7 @@
                 <a:ea typeface="Calibri" pitchFamily="34" charset="-122"/>
                 <a:cs typeface="Calibri" pitchFamily="34" charset="-120"/>
               </a:rPr>
-              <a:t>3.  The word 'fearless' contains the base word 'fear'.</a:t>
+              <a:t>3.  Adding '-less' to a word gives it the meaning 'full of'.</a:t>
             </a:r>
             <a:endParaRPr lang="en-US" sz="1300" dirty="0"/>
           </a:p>
@@ -35940,11 +36095,11 @@
             </a:avLst>
           </a:prstGeom>
           <a:solidFill>
-            <a:srgbClr val="DCFCE7"/>
-          </a:solidFill>
-          <a:ln w="12700">
-            <a:solidFill>
-              <a:srgbClr val="16A34A"/>
+            <a:srgbClr val="FEE2E2"/>
+          </a:solidFill>
+          <a:ln w="12700">
+            <a:solidFill>
+              <a:srgbClr val="DC2626"/>
             </a:solidFill>
             <a:prstDash val="solid"/>
           </a:ln>
@@ -35977,13 +36132,13 @@
             <a:r>
               <a:rPr lang="en-US" sz="1100" b="1" dirty="0">
                 <a:solidFill>
-                  <a:srgbClr val="16A34A"/>
+                  <a:srgbClr val="DC2626"/>
                 </a:solidFill>
                 <a:latin typeface="Trebuchet MS" pitchFamily="34" charset="0"/>
                 <a:ea typeface="Trebuchet MS" pitchFamily="34" charset="-122"/>
                 <a:cs typeface="Trebuchet MS" pitchFamily="34" charset="-120"/>
               </a:rPr>
-              <a:t>TRUE</a:t>
+              <a:t>FALSE</a:t>
             </a:r>
             <a:endParaRPr lang="en-US" sz="1100" dirty="0"/>
           </a:p>
@@ -36056,7 +36211,7 @@
                 <a:ea typeface="Calibri" pitchFamily="34" charset="-122"/>
                 <a:cs typeface="Calibri" pitchFamily="34" charset="-120"/>
               </a:rPr>
-              <a:t>4.  '-less' comes from Old English.</a:t>
+              <a:t>4.  You can add '-less' to a base word to mean 'without' that thing.</a:t>
             </a:r>
             <a:endParaRPr lang="en-US" sz="1300" dirty="0"/>
           </a:p>
@@ -36195,7 +36350,7 @@
                 <a:ea typeface="Calibri" pitchFamily="34" charset="-122"/>
                 <a:cs typeface="Calibri" pitchFamily="34" charset="-120"/>
               </a:rPr>
-              <a:t>5.  The suffix '-less' can only be added to verbs.</a:t>
+              <a:t>5.  The suffix '-less' turns a noun or adjective into a new adjective.</a:t>
             </a:r>
             <a:endParaRPr lang="en-US" sz="1300" dirty="0"/>
           </a:p>
@@ -36218,11 +36373,11 @@
             </a:avLst>
           </a:prstGeom>
           <a:solidFill>
-            <a:srgbClr val="FEE2E2"/>
-          </a:solidFill>
-          <a:ln w="12700">
-            <a:solidFill>
-              <a:srgbClr val="DC2626"/>
+            <a:srgbClr val="DCFCE7"/>
+          </a:solidFill>
+          <a:ln w="12700">
+            <a:solidFill>
+              <a:srgbClr val="16A34A"/>
             </a:solidFill>
             <a:prstDash val="solid"/>
           </a:ln>
@@ -36255,13 +36410,13 @@
             <a:r>
               <a:rPr lang="en-US" sz="1100" b="1" dirty="0">
                 <a:solidFill>
-                  <a:srgbClr val="DC2626"/>
+                  <a:srgbClr val="16A34A"/>
                 </a:solidFill>
                 <a:latin typeface="Trebuchet MS" pitchFamily="34" charset="0"/>
                 <a:ea typeface="Trebuchet MS" pitchFamily="34" charset="-122"/>
                 <a:cs typeface="Trebuchet MS" pitchFamily="34" charset="-120"/>
               </a:rPr>
-              <a:t>FALSE</a:t>
+              <a:t>TRUE</a:t>
             </a:r>
             <a:endParaRPr lang="en-US" sz="1100" dirty="0"/>
           </a:p>
@@ -36834,7 +36989,7 @@
                 <a:ea typeface="Trebuchet MS" pitchFamily="34" charset="-122"/>
                 <a:cs typeface="Trebuchet MS" pitchFamily="34" charset="-120"/>
               </a:rPr>
-              <a:t>helpless</a:t>
+              <a:t>hopeless</a:t>
             </a:r>
             <a:endParaRPr lang="en-US" sz="1300" dirty="0"/>
           </a:p>
@@ -36900,7 +37055,7 @@
                 <a:ea typeface="Trebuchet MS" pitchFamily="34" charset="-122"/>
                 <a:cs typeface="Trebuchet MS" pitchFamily="34" charset="-120"/>
               </a:rPr>
-              <a:t>fearless</a:t>
+              <a:t>careless</a:t>
             </a:r>
             <a:endParaRPr lang="en-US" sz="1300" dirty="0"/>
           </a:p>
@@ -36966,7 +37121,7 @@
                 <a:ea typeface="Trebuchet MS" pitchFamily="34" charset="-122"/>
                 <a:cs typeface="Trebuchet MS" pitchFamily="34" charset="-120"/>
               </a:rPr>
-              <a:t>homeless</a:t>
+              <a:t>helpless</a:t>
             </a:r>
             <a:endParaRPr lang="en-US" sz="1300" dirty="0"/>
           </a:p>
@@ -37032,7 +37187,7 @@
                 <a:ea typeface="Trebuchet MS" pitchFamily="34" charset="-122"/>
                 <a:cs typeface="Trebuchet MS" pitchFamily="34" charset="-120"/>
               </a:rPr>
-              <a:t>careless</a:t>
+              <a:t>harmless</a:t>
             </a:r>
             <a:endParaRPr lang="en-US" sz="1300" dirty="0"/>
           </a:p>
@@ -37098,7 +37253,7 @@
                 <a:ea typeface="Trebuchet MS" pitchFamily="34" charset="-122"/>
                 <a:cs typeface="Trebuchet MS" pitchFamily="34" charset="-120"/>
               </a:rPr>
-              <a:t>hopeless</a:t>
+              <a:t>fearless</a:t>
             </a:r>
             <a:endParaRPr lang="en-US" sz="1300" dirty="0"/>
           </a:p>
@@ -37164,7 +37319,7 @@
                 <a:ea typeface="Trebuchet MS" pitchFamily="34" charset="-122"/>
                 <a:cs typeface="Trebuchet MS" pitchFamily="34" charset="-120"/>
               </a:rPr>
-              <a:t>powerless</a:t>
+              <a:t>wireless</a:t>
             </a:r>
             <a:endParaRPr lang="en-US" sz="1300" dirty="0"/>
           </a:p>
@@ -37230,7 +37385,7 @@
                 <a:ea typeface="Trebuchet MS" pitchFamily="34" charset="-122"/>
                 <a:cs typeface="Trebuchet MS" pitchFamily="34" charset="-120"/>
               </a:rPr>
-              <a:t>thoughtless</a:t>
+              <a:t>endless</a:t>
             </a:r>
             <a:endParaRPr lang="en-US" sz="1300" dirty="0"/>
           </a:p>
@@ -37887,7 +38042,7 @@
                 <a:ea typeface="Trebuchet MS" pitchFamily="34" charset="-122"/>
                 <a:cs typeface="Trebuchet MS" pitchFamily="34" charset="-120"/>
               </a:rPr>
-              <a:t>help</a:t>
+              <a:t>hope</a:t>
             </a:r>
             <a:endParaRPr lang="en-US" sz="1300" dirty="0"/>
           </a:p>
@@ -38079,7 +38234,7 @@
                 <a:ea typeface="Trebuchet MS" pitchFamily="34" charset="-122"/>
                 <a:cs typeface="Trebuchet MS" pitchFamily="34" charset="-120"/>
               </a:rPr>
-              <a:t>power</a:t>
+              <a:t>care</a:t>
             </a:r>
             <a:endParaRPr lang="en-US" sz="1300" dirty="0"/>
           </a:p>
@@ -38168,7 +38323,7 @@
                 <a:ea typeface="Trebuchet MS" pitchFamily="34" charset="-122"/>
                 <a:cs typeface="Trebuchet MS" pitchFamily="34" charset="-120"/>
               </a:rPr>
-              <a:t>over-</a:t>
+              <a:t>mis-</a:t>
             </a:r>
             <a:endParaRPr lang="en-US" sz="1300" dirty="0"/>
           </a:p>
@@ -38232,7 +38387,7 @@
                 <a:ea typeface="Trebuchet MS" pitchFamily="34" charset="-122"/>
                 <a:cs typeface="Trebuchet MS" pitchFamily="34" charset="-120"/>
               </a:rPr>
-              <a:t>home</a:t>
+              <a:t>help</a:t>
             </a:r>
             <a:endParaRPr lang="en-US" sz="1300" dirty="0"/>
           </a:p>
@@ -38321,7 +38476,7 @@
                 <a:ea typeface="Trebuchet MS" pitchFamily="34" charset="-122"/>
                 <a:cs typeface="Trebuchet MS" pitchFamily="34" charset="-120"/>
               </a:rPr>
-              <a:t>care-</a:t>
+              <a:t>over-</a:t>
             </a:r>
             <a:endParaRPr lang="en-US" sz="1300" dirty="0"/>
           </a:p>
@@ -38385,7 +38540,7 @@
                 <a:ea typeface="Trebuchet MS" pitchFamily="34" charset="-122"/>
                 <a:cs typeface="Trebuchet MS" pitchFamily="34" charset="-120"/>
               </a:rPr>
-              <a:t>fear</a:t>
+              <a:t>power</a:t>
             </a:r>
             <a:endParaRPr lang="en-US" sz="1300" dirty="0"/>
           </a:p>
@@ -38474,7 +38629,7 @@
                 <a:ea typeface="Trebuchet MS" pitchFamily="34" charset="-122"/>
                 <a:cs typeface="Trebuchet MS" pitchFamily="34" charset="-120"/>
               </a:rPr>
-              <a:t>hope-</a:t>
+              <a:t>self-</a:t>
             </a:r>
             <a:endParaRPr lang="en-US" sz="1300" dirty="0"/>
           </a:p>
@@ -38538,7 +38693,7 @@
                 <a:ea typeface="Trebuchet MS" pitchFamily="34" charset="-122"/>
                 <a:cs typeface="Trebuchet MS" pitchFamily="34" charset="-120"/>
               </a:rPr>
-              <a:t>thought</a:t>
+              <a:t>harm</a:t>
             </a:r>
             <a:endParaRPr lang="en-US" sz="1300" dirty="0"/>
           </a:p>
@@ -38787,7 +38942,7 @@
                 <a:ea typeface="Trebuchet MS" pitchFamily="34" charset="-122"/>
                 <a:cs typeface="Trebuchet MS" pitchFamily="34" charset="-120"/>
               </a:rPr>
-              <a:t>help</a:t>
+              <a:t>hope</a:t>
             </a:r>
             <a:endParaRPr lang="en-US" sz="1300" dirty="0"/>
           </a:p>
@@ -39004,7 +39159,7 @@
                 <a:ea typeface="Trebuchet MS" pitchFamily="34" charset="-122"/>
                 <a:cs typeface="Trebuchet MS" pitchFamily="34" charset="-120"/>
               </a:rPr>
-              <a:t>helpless</a:t>
+              <a:t>hopeless</a:t>
             </a:r>
             <a:endParaRPr lang="en-US" sz="1400" dirty="0"/>
           </a:p>
@@ -39408,7 +39563,7 @@
                 <a:ea typeface="Trebuchet MS" pitchFamily="34" charset="-122"/>
                 <a:cs typeface="Trebuchet MS" pitchFamily="34" charset="-120"/>
               </a:rPr>
-              <a:t>helpless</a:t>
+              <a:t>hopeless</a:t>
             </a:r>
             <a:endParaRPr lang="en-US" sz="1200" dirty="0"/>
           </a:p>
@@ -39474,7 +39629,7 @@
                 <a:ea typeface="Calibri" pitchFamily="34" charset="-122"/>
                 <a:cs typeface="Calibri" pitchFamily="34" charset="-120"/>
               </a:rPr>
-              <a:t>Not able to do things for yourself or unable to be helped.</a:t>
+              <a:t>When there is no chance of something getting better or working out.</a:t>
             </a:r>
             <a:endParaRPr lang="en-US" sz="1200" dirty="0"/>
           </a:p>
@@ -39547,7 +39702,7 @@
                 <a:ea typeface="Trebuchet MS" pitchFamily="34" charset="-122"/>
                 <a:cs typeface="Trebuchet MS" pitchFamily="34" charset="-120"/>
               </a:rPr>
-              <a:t>fearless</a:t>
+              <a:t>careless</a:t>
             </a:r>
             <a:endParaRPr lang="en-US" sz="1200" dirty="0"/>
           </a:p>
@@ -39613,7 +39768,7 @@
                 <a:ea typeface="Calibri" pitchFamily="34" charset="-122"/>
                 <a:cs typeface="Calibri" pitchFamily="34" charset="-120"/>
               </a:rPr>
-              <a:t>Not thinking about how your actions might affect other people.</a:t>
+              <a:t>Something that goes on for so long it seems like it will never stop.</a:t>
             </a:r>
             <a:endParaRPr lang="en-US" sz="1200" dirty="0"/>
           </a:p>
@@ -39686,7 +39841,7 @@
                 <a:ea typeface="Trebuchet MS" pitchFamily="34" charset="-122"/>
                 <a:cs typeface="Trebuchet MS" pitchFamily="34" charset="-120"/>
               </a:rPr>
-              <a:t>homeless</a:t>
+              <a:t>helpless</a:t>
             </a:r>
             <a:endParaRPr lang="en-US" sz="1200" dirty="0"/>
           </a:p>
@@ -39752,7 +39907,7 @@
                 <a:ea typeface="Calibri" pitchFamily="34" charset="-122"/>
                 <a:cs typeface="Calibri" pitchFamily="34" charset="-120"/>
               </a:rPr>
-              <a:t>Without a home or place to live.</a:t>
+              <a:t>Unable to do anything to help yourself or change a situation.</a:t>
             </a:r>
             <a:endParaRPr lang="en-US" sz="1200" dirty="0"/>
           </a:p>
@@ -39825,7 +39980,7 @@
                 <a:ea typeface="Trebuchet MS" pitchFamily="34" charset="-122"/>
                 <a:cs typeface="Trebuchet MS" pitchFamily="34" charset="-120"/>
               </a:rPr>
-              <a:t>careless</a:t>
+              <a:t>harmless</a:t>
             </a:r>
             <a:endParaRPr lang="en-US" sz="1200" dirty="0"/>
           </a:p>
@@ -39891,7 +40046,7 @@
                 <a:ea typeface="Calibri" pitchFamily="34" charset="-122"/>
                 <a:cs typeface="Calibri" pitchFamily="34" charset="-120"/>
               </a:rPr>
-              <a:t>Having no hope; when a situation seems impossible to fix.</a:t>
+              <a:t>Not afraid of anything; very brave and bold.</a:t>
             </a:r>
             <a:endParaRPr lang="en-US" sz="1200" dirty="0"/>
           </a:p>
@@ -39964,7 +40119,7 @@
                 <a:ea typeface="Trebuchet MS" pitchFamily="34" charset="-122"/>
                 <a:cs typeface="Trebuchet MS" pitchFamily="34" charset="-120"/>
               </a:rPr>
-              <a:t>hopeless</a:t>
+              <a:t>fearless</a:t>
             </a:r>
             <a:endParaRPr lang="en-US" sz="1200" dirty="0"/>
           </a:p>
@@ -40030,7 +40185,7 @@
                 <a:ea typeface="Calibri" pitchFamily="34" charset="-122"/>
                 <a:cs typeface="Calibri" pitchFamily="34" charset="-120"/>
               </a:rPr>
-              <a:t>Not paying enough attention; making mistakes because you are not careful.</a:t>
+              <a:t>Something that cannot hurt you or cause any damage.</a:t>
             </a:r>
             <a:endParaRPr lang="en-US" sz="1200" dirty="0"/>
           </a:p>
@@ -40103,7 +40258,7 @@
                 <a:ea typeface="Trebuchet MS" pitchFamily="34" charset="-122"/>
                 <a:cs typeface="Trebuchet MS" pitchFamily="34" charset="-120"/>
               </a:rPr>
-              <a:t>powerless</a:t>
+              <a:t>wireless</a:t>
             </a:r>
             <a:endParaRPr lang="en-US" sz="1200" dirty="0"/>
           </a:p>
@@ -40169,7 +40324,7 @@
                 <a:ea typeface="Calibri" pitchFamily="34" charset="-122"/>
                 <a:cs typeface="Calibri" pitchFamily="34" charset="-120"/>
               </a:rPr>
-              <a:t>Having no power or ability to do or change something.</a:t>
+              <a:t>Working without wires or cables, like Wi-Fi on a device.</a:t>
             </a:r>
             <a:endParaRPr lang="en-US" sz="1200" dirty="0"/>
           </a:p>
@@ -40242,7 +40397,7 @@
                 <a:ea typeface="Trebuchet MS" pitchFamily="34" charset="-122"/>
                 <a:cs typeface="Trebuchet MS" pitchFamily="34" charset="-120"/>
               </a:rPr>
-              <a:t>thoughtless</a:t>
+              <a:t>endless</a:t>
             </a:r>
             <a:endParaRPr lang="en-US" sz="1200" dirty="0"/>
           </a:p>
@@ -40308,7 +40463,7 @@
                 <a:ea typeface="Calibri" pitchFamily="34" charset="-122"/>
                 <a:cs typeface="Calibri" pitchFamily="34" charset="-120"/>
               </a:rPr>
-              <a:t>Having no fear at all; very brave.</a:t>
+              <a:t>Not paying enough attention to what you are doing, often making mistakes.</a:t>
             </a:r>
             <a:endParaRPr lang="en-US" sz="1200" dirty="0"/>
           </a:p>
@@ -40803,7 +40958,7 @@
                 <a:ea typeface="Calibri" pitchFamily="34" charset="-122"/>
                 <a:cs typeface="Calibri" pitchFamily="34" charset="-120"/>
               </a:rPr>
-              <a:t>The lost puppy looked helpless sitting alone in the rain.</a:t>
+              <a:t>The lost puppy looked helpless sitting in the rain outside the school gate.</a:t>
             </a:r>
             <a:endParaRPr lang="en-US" sz="1500" dirty="0"/>
           </a:p>
@@ -40967,7 +41122,7 @@
                 <a:ea typeface="Calibri" pitchFamily="34" charset="-122"/>
                 <a:cs typeface="Calibri" pitchFamily="34" charset="-120"/>
               </a:rPr>
-              <a:t>The fearless firefighter ran into the burning building to save the family.</a:t>
+              <a:t>She was speechless when she found out she had won the art competition.</a:t>
             </a:r>
             <a:endParaRPr lang="en-US" sz="1500" dirty="0"/>
           </a:p>
@@ -41131,7 +41286,7 @@
                 <a:ea typeface="Calibri" pitchFamily="34" charset="-122"/>
                 <a:cs typeface="Calibri" pitchFamily="34" charset="-120"/>
               </a:rPr>
-              <a:t>It was thoughtless of Jake to leave his friend out of the game.</a:t>
+              <a:t>Please don't be careless with your science equipment during the experiment.</a:t>
             </a:r>
             <a:endParaRPr lang="en-US" sz="1500" dirty="0"/>
           </a:p>
